--- a/3rd Year/SEMESTER 2/TRSI/Raport de cercetare/DiabetRisc_Prezentare.pptx
+++ b/3rd Year/SEMESTER 2/TRSI/Raport de cercetare/DiabetRisc_Prezentare.pptx
@@ -67,35 +67,69 @@
             <a:noAutofit/>
           </a:bodyPr>
           <a:p>
+            <a:pPr algn="ctr"/>
             <a:r>
-              <a:rPr lang="en-US" sz="1800" b="0" u="none" strike="noStrike">
-                <a:solidFill>
-                  <a:schemeClr val="dk1"/>
-                </a:solidFill>
-                <a:effectLst/>
-                <a:uFillTx/>
-                <a:latin typeface="Calibri"/>
+              <a:rPr lang="en-US" sz="4400" b="0" u="none" strike="noStrike">
+                <a:solidFill>
+                  <a:srgbClr val="000000"/>
+                </a:solidFill>
+                <a:effectLst/>
+                <a:uFillTx/>
+                <a:latin typeface="Arial"/>
               </a:rPr>
-              <a:t>Click to move the </a:t>
+              <a:t>Click </a:t>
             </a:r>
             <a:r>
-              <a:rPr lang="en-US" sz="1800" b="0" u="none" strike="noStrike">
-                <a:solidFill>
-                  <a:schemeClr val="dk1"/>
-                </a:solidFill>
-                <a:effectLst/>
-                <a:uFillTx/>
-                <a:latin typeface="Calibri"/>
+              <a:rPr lang="en-US" sz="4400" b="0" u="none" strike="noStrike">
+                <a:solidFill>
+                  <a:srgbClr val="000000"/>
+                </a:solidFill>
+                <a:effectLst/>
+                <a:uFillTx/>
+                <a:latin typeface="Arial"/>
+              </a:rPr>
+              <a:t>to </a:t>
+            </a:r>
+            <a:r>
+              <a:rPr lang="en-US" sz="4400" b="0" u="none" strike="noStrike">
+                <a:solidFill>
+                  <a:srgbClr val="000000"/>
+                </a:solidFill>
+                <a:effectLst/>
+                <a:uFillTx/>
+                <a:latin typeface="Arial"/>
+              </a:rPr>
+              <a:t>move </a:t>
+            </a:r>
+            <a:r>
+              <a:rPr lang="en-US" sz="4400" b="0" u="none" strike="noStrike">
+                <a:solidFill>
+                  <a:srgbClr val="000000"/>
+                </a:solidFill>
+                <a:effectLst/>
+                <a:uFillTx/>
+                <a:latin typeface="Arial"/>
+              </a:rPr>
+              <a:t>the </a:t>
+            </a:r>
+            <a:r>
+              <a:rPr lang="en-US" sz="4400" b="0" u="none" strike="noStrike">
+                <a:solidFill>
+                  <a:srgbClr val="000000"/>
+                </a:solidFill>
+                <a:effectLst/>
+                <a:uFillTx/>
+                <a:latin typeface="Arial"/>
               </a:rPr>
               <a:t>slide</a:t>
             </a:r>
-            <a:endParaRPr lang="en-US" sz="1800" b="0" u="none" strike="noStrike">
-              <a:solidFill>
-                <a:schemeClr val="dk1"/>
-              </a:solidFill>
-              <a:effectLst/>
-              <a:uFillTx/>
-              <a:latin typeface="Calibri"/>
+            <a:endParaRPr lang="en-US" sz="4400" b="0" u="none" strike="noStrike">
+              <a:solidFill>
+                <a:srgbClr val="000000"/>
+              </a:solidFill>
+              <a:effectLst/>
+              <a:uFillTx/>
+              <a:latin typeface="Arial"/>
             </a:endParaRPr>
           </a:p>
         </p:txBody>
@@ -140,7 +174,29 @@
                 <a:uFillTx/>
                 <a:latin typeface="Arial"/>
               </a:rPr>
-              <a:t>Click to edit the notes format</a:t>
+              <a:t>Click to edit </a:t>
+            </a:r>
+            <a:r>
+              <a:rPr lang="en-US" sz="2000" b="0" u="none" strike="noStrike">
+                <a:solidFill>
+                  <a:srgbClr val="000000"/>
+                </a:solidFill>
+                <a:effectLst/>
+                <a:uFillTx/>
+                <a:latin typeface="Arial"/>
+              </a:rPr>
+              <a:t>the notes </a:t>
+            </a:r>
+            <a:r>
+              <a:rPr lang="en-US" sz="2000" b="0" u="none" strike="noStrike">
+                <a:solidFill>
+                  <a:srgbClr val="000000"/>
+                </a:solidFill>
+                <a:effectLst/>
+                <a:uFillTx/>
+                <a:latin typeface="Arial"/>
+              </a:rPr>
+              <a:t>format</a:t>
             </a:r>
             <a:endParaRPr lang="en-US" sz="2000" b="0" u="none" strike="noStrike">
               <a:solidFill>
@@ -382,7 +438,7 @@
             <a:pPr indent="0" algn="r">
               <a:buNone/>
             </a:pPr>
-            <a:fld id="{5B3E2291-B25E-40B8-BEFF-6D2CE792A3B0}" type="slidenum">
+            <a:fld id="{97C09119-3477-42C2-BE63-BEE7CC99762B}" type="slidenum">
               <a:rPr lang="en-US" sz="1400" b="0" u="none" strike="noStrike">
                 <a:solidFill>
                   <a:srgbClr val="000000"/>
@@ -440,7 +496,7 @@
         <p:spPr>
           <a:xfrm>
             <a:off x="685800" y="1143000"/>
-            <a:ext cx="5486040" cy="3085920"/>
+            <a:ext cx="5485680" cy="3085560"/>
           </a:xfrm>
           <a:prstGeom prst="rect">
             <a:avLst/>
@@ -463,7 +519,7 @@
         <p:spPr>
           <a:xfrm>
             <a:off x="685800" y="4400640"/>
-            <a:ext cx="5486040" cy="3600000"/>
+            <a:ext cx="5485680" cy="3599640"/>
           </a:xfrm>
           <a:prstGeom prst="rect">
             <a:avLst/>
@@ -505,7 +561,7 @@
         <p:spPr>
           <a:xfrm>
             <a:off x="3884760" y="8685360"/>
-            <a:ext cx="2971440" cy="458280"/>
+            <a:ext cx="2971080" cy="457920"/>
           </a:xfrm>
           <a:prstGeom prst="rect">
             <a:avLst/>
@@ -525,6 +581,9 @@
                 <a:spcPct val="100000"/>
               </a:lnSpc>
               <a:buNone/>
+              <a:tabLst>
+                <a:tab algn="l" pos="0"/>
+              </a:tabLst>
               <a:defRPr lang="en-US" sz="1200" b="0" u="none" strike="noStrike">
                 <a:solidFill>
                   <a:schemeClr val="dk1"/>
@@ -542,8 +601,11 @@
                 <a:spcPct val="100000"/>
               </a:lnSpc>
               <a:buNone/>
-            </a:pPr>
-            <a:fld id="{6CBAA5A9-2176-4D16-8BC7-70B457FA8476}" type="slidenum">
+              <a:tabLst>
+                <a:tab algn="l" pos="0"/>
+              </a:tabLst>
+            </a:pPr>
+            <a:fld id="{E6BA5E0A-F168-4F36-8060-FB33484F908D}" type="slidenum">
               <a:rPr lang="en-US" sz="1200" b="0" u="none" strike="noStrike">
                 <a:solidFill>
                   <a:schemeClr val="dk1"/>
@@ -601,7 +663,7 @@
         <p:spPr>
           <a:xfrm>
             <a:off x="685800" y="1143000"/>
-            <a:ext cx="5486040" cy="3085920"/>
+            <a:ext cx="5485680" cy="3085560"/>
           </a:xfrm>
           <a:prstGeom prst="rect">
             <a:avLst/>
@@ -624,7 +686,7 @@
         <p:spPr>
           <a:xfrm>
             <a:off x="685800" y="4400640"/>
-            <a:ext cx="5486040" cy="3600000"/>
+            <a:ext cx="5485680" cy="3599640"/>
           </a:xfrm>
           <a:prstGeom prst="rect">
             <a:avLst/>
@@ -666,7 +728,7 @@
         <p:spPr>
           <a:xfrm>
             <a:off x="3884760" y="8685360"/>
-            <a:ext cx="2971440" cy="458280"/>
+            <a:ext cx="2971080" cy="457920"/>
           </a:xfrm>
           <a:prstGeom prst="rect">
             <a:avLst/>
@@ -686,6 +748,9 @@
                 <a:spcPct val="100000"/>
               </a:lnSpc>
               <a:buNone/>
+              <a:tabLst>
+                <a:tab algn="l" pos="0"/>
+              </a:tabLst>
               <a:defRPr lang="en-US" sz="1200" b="0" u="none" strike="noStrike">
                 <a:solidFill>
                   <a:schemeClr val="dk1"/>
@@ -703,8 +768,11 @@
                 <a:spcPct val="100000"/>
               </a:lnSpc>
               <a:buNone/>
-            </a:pPr>
-            <a:fld id="{E529CBFB-F3E9-448F-9445-39374084EF75}" type="slidenum">
+              <a:tabLst>
+                <a:tab algn="l" pos="0"/>
+              </a:tabLst>
+            </a:pPr>
+            <a:fld id="{F812AF37-3C1D-46A4-BF00-FBABEC6C4234}" type="slidenum">
               <a:rPr lang="en-US" sz="1200" b="0" u="none" strike="noStrike">
                 <a:solidFill>
                   <a:schemeClr val="dk1"/>
@@ -762,7 +830,7 @@
         <p:spPr>
           <a:xfrm>
             <a:off x="685800" y="1143000"/>
-            <a:ext cx="5486040" cy="3085920"/>
+            <a:ext cx="5485680" cy="3085560"/>
           </a:xfrm>
           <a:prstGeom prst="rect">
             <a:avLst/>
@@ -785,7 +853,7 @@
         <p:spPr>
           <a:xfrm>
             <a:off x="685800" y="4400640"/>
-            <a:ext cx="5486040" cy="3600000"/>
+            <a:ext cx="5485680" cy="3599640"/>
           </a:xfrm>
           <a:prstGeom prst="rect">
             <a:avLst/>
@@ -827,7 +895,7 @@
         <p:spPr>
           <a:xfrm>
             <a:off x="3884760" y="8685360"/>
-            <a:ext cx="2971440" cy="458280"/>
+            <a:ext cx="2971080" cy="457920"/>
           </a:xfrm>
           <a:prstGeom prst="rect">
             <a:avLst/>
@@ -847,6 +915,9 @@
                 <a:spcPct val="100000"/>
               </a:lnSpc>
               <a:buNone/>
+              <a:tabLst>
+                <a:tab algn="l" pos="0"/>
+              </a:tabLst>
               <a:defRPr lang="en-US" sz="1200" b="0" u="none" strike="noStrike">
                 <a:solidFill>
                   <a:schemeClr val="dk1"/>
@@ -864,8 +935,11 @@
                 <a:spcPct val="100000"/>
               </a:lnSpc>
               <a:buNone/>
-            </a:pPr>
-            <a:fld id="{926254B4-1052-4837-A231-CB2E5C59250B}" type="slidenum">
+              <a:tabLst>
+                <a:tab algn="l" pos="0"/>
+              </a:tabLst>
+            </a:pPr>
+            <a:fld id="{72573441-01FF-4121-B531-110BB6A9A7F9}" type="slidenum">
               <a:rPr lang="en-US" sz="1200" b="0" u="none" strike="noStrike">
                 <a:solidFill>
                   <a:schemeClr val="dk1"/>
@@ -923,7 +997,7 @@
         <p:spPr>
           <a:xfrm>
             <a:off x="685800" y="1143000"/>
-            <a:ext cx="5486040" cy="3085920"/>
+            <a:ext cx="5485680" cy="3085560"/>
           </a:xfrm>
           <a:prstGeom prst="rect">
             <a:avLst/>
@@ -946,7 +1020,7 @@
         <p:spPr>
           <a:xfrm>
             <a:off x="685800" y="4400640"/>
-            <a:ext cx="5486040" cy="3600000"/>
+            <a:ext cx="5485680" cy="3599640"/>
           </a:xfrm>
           <a:prstGeom prst="rect">
             <a:avLst/>
@@ -988,7 +1062,7 @@
         <p:spPr>
           <a:xfrm>
             <a:off x="3884760" y="8685360"/>
-            <a:ext cx="2971440" cy="458280"/>
+            <a:ext cx="2971080" cy="457920"/>
           </a:xfrm>
           <a:prstGeom prst="rect">
             <a:avLst/>
@@ -1008,6 +1082,9 @@
                 <a:spcPct val="100000"/>
               </a:lnSpc>
               <a:buNone/>
+              <a:tabLst>
+                <a:tab algn="l" pos="0"/>
+              </a:tabLst>
               <a:defRPr lang="en-US" sz="1200" b="0" u="none" strike="noStrike">
                 <a:solidFill>
                   <a:schemeClr val="dk1"/>
@@ -1025,8 +1102,11 @@
                 <a:spcPct val="100000"/>
               </a:lnSpc>
               <a:buNone/>
-            </a:pPr>
-            <a:fld id="{057D7309-2AFE-49AD-A558-78B07DD5BE02}" type="slidenum">
+              <a:tabLst>
+                <a:tab algn="l" pos="0"/>
+              </a:tabLst>
+            </a:pPr>
+            <a:fld id="{746B31BD-5348-445E-A9BD-E9F983C78D8D}" type="slidenum">
               <a:rPr lang="en-US" sz="1200" b="0" u="none" strike="noStrike">
                 <a:solidFill>
                   <a:schemeClr val="dk1"/>
@@ -1084,7 +1164,7 @@
         <p:spPr>
           <a:xfrm>
             <a:off x="685800" y="1143000"/>
-            <a:ext cx="5486040" cy="3085920"/>
+            <a:ext cx="5485680" cy="3085560"/>
           </a:xfrm>
           <a:prstGeom prst="rect">
             <a:avLst/>
@@ -1107,7 +1187,7 @@
         <p:spPr>
           <a:xfrm>
             <a:off x="685800" y="4400640"/>
-            <a:ext cx="5486040" cy="3600000"/>
+            <a:ext cx="5485680" cy="3599640"/>
           </a:xfrm>
           <a:prstGeom prst="rect">
             <a:avLst/>
@@ -1149,7 +1229,7 @@
         <p:spPr>
           <a:xfrm>
             <a:off x="3884760" y="8685360"/>
-            <a:ext cx="2971440" cy="458280"/>
+            <a:ext cx="2971080" cy="457920"/>
           </a:xfrm>
           <a:prstGeom prst="rect">
             <a:avLst/>
@@ -1169,6 +1249,9 @@
                 <a:spcPct val="100000"/>
               </a:lnSpc>
               <a:buNone/>
+              <a:tabLst>
+                <a:tab algn="l" pos="0"/>
+              </a:tabLst>
               <a:defRPr lang="en-US" sz="1200" b="0" u="none" strike="noStrike">
                 <a:solidFill>
                   <a:schemeClr val="dk1"/>
@@ -1186,8 +1269,11 @@
                 <a:spcPct val="100000"/>
               </a:lnSpc>
               <a:buNone/>
-            </a:pPr>
-            <a:fld id="{421C7345-0CF3-4B37-BD58-56C0B6EE3989}" type="slidenum">
+              <a:tabLst>
+                <a:tab algn="l" pos="0"/>
+              </a:tabLst>
+            </a:pPr>
+            <a:fld id="{CD64134C-5146-4B6A-9C00-B5AA916E39DD}" type="slidenum">
               <a:rPr lang="en-US" sz="1200" b="0" u="none" strike="noStrike">
                 <a:solidFill>
                   <a:schemeClr val="dk1"/>
@@ -1245,7 +1331,7 @@
         <p:spPr>
           <a:xfrm>
             <a:off x="685800" y="1143000"/>
-            <a:ext cx="5486040" cy="3085920"/>
+            <a:ext cx="5485680" cy="3085560"/>
           </a:xfrm>
           <a:prstGeom prst="rect">
             <a:avLst/>
@@ -1268,7 +1354,7 @@
         <p:spPr>
           <a:xfrm>
             <a:off x="685800" y="4400640"/>
-            <a:ext cx="5486040" cy="3600000"/>
+            <a:ext cx="5485680" cy="3599640"/>
           </a:xfrm>
           <a:prstGeom prst="rect">
             <a:avLst/>
@@ -1310,7 +1396,7 @@
         <p:spPr>
           <a:xfrm>
             <a:off x="3884760" y="8685360"/>
-            <a:ext cx="2971440" cy="458280"/>
+            <a:ext cx="2971080" cy="457920"/>
           </a:xfrm>
           <a:prstGeom prst="rect">
             <a:avLst/>
@@ -1330,6 +1416,9 @@
                 <a:spcPct val="100000"/>
               </a:lnSpc>
               <a:buNone/>
+              <a:tabLst>
+                <a:tab algn="l" pos="0"/>
+              </a:tabLst>
               <a:defRPr lang="en-US" sz="1200" b="0" u="none" strike="noStrike">
                 <a:solidFill>
                   <a:schemeClr val="dk1"/>
@@ -1347,8 +1436,11 @@
                 <a:spcPct val="100000"/>
               </a:lnSpc>
               <a:buNone/>
-            </a:pPr>
-            <a:fld id="{E4B3540E-BC0D-4502-B32B-B252BDAA236B}" type="slidenum">
+              <a:tabLst>
+                <a:tab algn="l" pos="0"/>
+              </a:tabLst>
+            </a:pPr>
+            <a:fld id="{05EF8235-7C2B-43CD-B1C0-F71922D15A33}" type="slidenum">
               <a:rPr lang="en-US" sz="1200" b="0" u="none" strike="noStrike">
                 <a:solidFill>
                   <a:schemeClr val="dk1"/>
@@ -1406,7 +1498,7 @@
         <p:spPr>
           <a:xfrm>
             <a:off x="685800" y="1143000"/>
-            <a:ext cx="5486040" cy="3085920"/>
+            <a:ext cx="5485680" cy="3085560"/>
           </a:xfrm>
           <a:prstGeom prst="rect">
             <a:avLst/>
@@ -1429,7 +1521,7 @@
         <p:spPr>
           <a:xfrm>
             <a:off x="685800" y="4400640"/>
-            <a:ext cx="5486040" cy="3600000"/>
+            <a:ext cx="5485680" cy="3599640"/>
           </a:xfrm>
           <a:prstGeom prst="rect">
             <a:avLst/>
@@ -1471,7 +1563,7 @@
         <p:spPr>
           <a:xfrm>
             <a:off x="3884760" y="8685360"/>
-            <a:ext cx="2971440" cy="458280"/>
+            <a:ext cx="2971080" cy="457920"/>
           </a:xfrm>
           <a:prstGeom prst="rect">
             <a:avLst/>
@@ -1491,6 +1583,9 @@
                 <a:spcPct val="100000"/>
               </a:lnSpc>
               <a:buNone/>
+              <a:tabLst>
+                <a:tab algn="l" pos="0"/>
+              </a:tabLst>
               <a:defRPr lang="en-US" sz="1200" b="0" u="none" strike="noStrike">
                 <a:solidFill>
                   <a:schemeClr val="dk1"/>
@@ -1508,8 +1603,11 @@
                 <a:spcPct val="100000"/>
               </a:lnSpc>
               <a:buNone/>
-            </a:pPr>
-            <a:fld id="{1AE4A635-2731-4188-8F4A-FA64315D3632}" type="slidenum">
+              <a:tabLst>
+                <a:tab algn="l" pos="0"/>
+              </a:tabLst>
+            </a:pPr>
+            <a:fld id="{4ABCB889-C7AF-413B-9359-3D6EB82CAFE0}" type="slidenum">
               <a:rPr lang="en-US" sz="1200" b="0" u="none" strike="noStrike">
                 <a:solidFill>
                   <a:schemeClr val="dk1"/>
@@ -1567,7 +1665,7 @@
         <p:spPr>
           <a:xfrm>
             <a:off x="685800" y="1143000"/>
-            <a:ext cx="5486040" cy="3085920"/>
+            <a:ext cx="5485680" cy="3085560"/>
           </a:xfrm>
           <a:prstGeom prst="rect">
             <a:avLst/>
@@ -1590,7 +1688,7 @@
         <p:spPr>
           <a:xfrm>
             <a:off x="685800" y="4400640"/>
-            <a:ext cx="5486040" cy="3600000"/>
+            <a:ext cx="5485680" cy="3599640"/>
           </a:xfrm>
           <a:prstGeom prst="rect">
             <a:avLst/>
@@ -1632,7 +1730,7 @@
         <p:spPr>
           <a:xfrm>
             <a:off x="3884760" y="8685360"/>
-            <a:ext cx="2971440" cy="458280"/>
+            <a:ext cx="2971080" cy="457920"/>
           </a:xfrm>
           <a:prstGeom prst="rect">
             <a:avLst/>
@@ -1652,6 +1750,9 @@
                 <a:spcPct val="100000"/>
               </a:lnSpc>
               <a:buNone/>
+              <a:tabLst>
+                <a:tab algn="l" pos="0"/>
+              </a:tabLst>
               <a:defRPr lang="en-US" sz="1200" b="0" u="none" strike="noStrike">
                 <a:solidFill>
                   <a:schemeClr val="dk1"/>
@@ -1669,8 +1770,11 @@
                 <a:spcPct val="100000"/>
               </a:lnSpc>
               <a:buNone/>
-            </a:pPr>
-            <a:fld id="{6BC1C5C0-D47F-46A3-A6B6-A6180D034092}" type="slidenum">
+              <a:tabLst>
+                <a:tab algn="l" pos="0"/>
+              </a:tabLst>
+            </a:pPr>
+            <a:fld id="{617B93C1-FA01-4237-91DB-7063956E3ECC}" type="slidenum">
               <a:rPr lang="en-US" sz="1200" b="0" u="none" strike="noStrike">
                 <a:solidFill>
                   <a:schemeClr val="dk1"/>
@@ -1680,7 +1784,7 @@
                 <a:latin typeface="+mn-lt"/>
                 <a:ea typeface="+mn-ea"/>
               </a:rPr>
-              <a:t>&lt;number&gt;</a:t>
+              <a:t>1</a:t>
             </a:fld>
             <a:endParaRPr lang="en-US" sz="1200" b="0" u="none" strike="noStrike">
               <a:solidFill>
@@ -1772,27 +1876,82 @@
             <a:noAutofit/>
           </a:bodyPr>
           <a:p>
-            <a:pPr indent="0">
+            <a:pPr indent="0" algn="ctr">
               <a:buNone/>
             </a:pPr>
             <a:r>
-              <a:rPr lang="en-US" sz="1800" b="0" u="none" strike="noStrike">
-                <a:solidFill>
-                  <a:schemeClr val="dk1"/>
-                </a:solidFill>
-                <a:effectLst/>
-                <a:uFillTx/>
-                <a:latin typeface="Calibri"/>
+              <a:rPr lang="en-US" sz="4400" b="0" u="none" strike="noStrike">
+                <a:solidFill>
+                  <a:srgbClr val="000000"/>
+                </a:solidFill>
+                <a:effectLst/>
+                <a:uFillTx/>
+                <a:latin typeface="Arial"/>
               </a:rPr>
-              <a:t>Click to edit the title text format</a:t>
+              <a:t>Click </a:t>
             </a:r>
-            <a:endParaRPr lang="en-US" sz="1800" b="0" u="none" strike="noStrike">
-              <a:solidFill>
-                <a:schemeClr val="dk1"/>
-              </a:solidFill>
-              <a:effectLst/>
-              <a:uFillTx/>
-              <a:latin typeface="Calibri"/>
+            <a:r>
+              <a:rPr lang="en-US" sz="4400" b="0" u="none" strike="noStrike">
+                <a:solidFill>
+                  <a:srgbClr val="000000"/>
+                </a:solidFill>
+                <a:effectLst/>
+                <a:uFillTx/>
+                <a:latin typeface="Arial"/>
+              </a:rPr>
+              <a:t>to edit </a:t>
+            </a:r>
+            <a:r>
+              <a:rPr lang="en-US" sz="4400" b="0" u="none" strike="noStrike">
+                <a:solidFill>
+                  <a:srgbClr val="000000"/>
+                </a:solidFill>
+                <a:effectLst/>
+                <a:uFillTx/>
+                <a:latin typeface="Arial"/>
+              </a:rPr>
+              <a:t>the </a:t>
+            </a:r>
+            <a:r>
+              <a:rPr lang="en-US" sz="4400" b="0" u="none" strike="noStrike">
+                <a:solidFill>
+                  <a:srgbClr val="000000"/>
+                </a:solidFill>
+                <a:effectLst/>
+                <a:uFillTx/>
+                <a:latin typeface="Arial"/>
+              </a:rPr>
+              <a:t>title </a:t>
+            </a:r>
+            <a:r>
+              <a:rPr lang="en-US" sz="4400" b="0" u="none" strike="noStrike">
+                <a:solidFill>
+                  <a:srgbClr val="000000"/>
+                </a:solidFill>
+                <a:effectLst/>
+                <a:uFillTx/>
+                <a:latin typeface="Arial"/>
+              </a:rPr>
+              <a:t>text </a:t>
+            </a:r>
+            <a:r>
+              <a:rPr lang="en-US" sz="4400" b="0" u="none" strike="noStrike">
+                <a:solidFill>
+                  <a:srgbClr val="000000"/>
+                </a:solidFill>
+                <a:effectLst/>
+                <a:uFillTx/>
+                <a:latin typeface="Arial"/>
+              </a:rPr>
+              <a:t>format</a:t>
+            </a:r>
+            <a:endParaRPr lang="en-US" sz="4400" b="0" u="none" strike="noStrike">
+              <a:solidFill>
+                <a:srgbClr val="000000"/>
+              </a:solidFill>
+              <a:effectLst/>
+              <a:uFillTx/>
+              <a:latin typeface="Arial"/>
             </a:endParaRPr>
           </a:p>
         </p:txBody>
@@ -1839,21 +1998,21 @@
             <a:r>
               <a:rPr lang="en-US" sz="3200" b="0" u="none" strike="noStrike">
                 <a:solidFill>
-                  <a:schemeClr val="dk1"/>
-                </a:solidFill>
-                <a:effectLst/>
-                <a:uFillTx/>
-                <a:latin typeface="Calibri"/>
+                  <a:srgbClr val="000000"/>
+                </a:solidFill>
+                <a:effectLst/>
+                <a:uFillTx/>
+                <a:latin typeface="Arial"/>
               </a:rPr>
               <a:t>Click to edit the outline text format</a:t>
             </a:r>
             <a:endParaRPr lang="en-US" sz="3200" b="0" u="none" strike="noStrike">
               <a:solidFill>
-                <a:schemeClr val="dk1"/>
-              </a:solidFill>
-              <a:effectLst/>
-              <a:uFillTx/>
-              <a:latin typeface="Calibri"/>
+                <a:srgbClr val="000000"/>
+              </a:solidFill>
+              <a:effectLst/>
+              <a:uFillTx/>
+              <a:latin typeface="Arial"/>
             </a:endParaRPr>
           </a:p>
           <a:p>
@@ -1869,23 +2028,23 @@
               <a:buChar char=""/>
             </a:pPr>
             <a:r>
-              <a:rPr lang="en-US" sz="2400" b="0" u="none" strike="noStrike">
-                <a:solidFill>
-                  <a:schemeClr val="dk1"/>
-                </a:solidFill>
-                <a:effectLst/>
-                <a:uFillTx/>
-                <a:latin typeface="Calibri"/>
+              <a:rPr lang="en-US" sz="2800" b="0" u="none" strike="noStrike">
+                <a:solidFill>
+                  <a:srgbClr val="000000"/>
+                </a:solidFill>
+                <a:effectLst/>
+                <a:uFillTx/>
+                <a:latin typeface="Arial"/>
               </a:rPr>
               <a:t>Second Outline Level</a:t>
             </a:r>
-            <a:endParaRPr lang="en-US" sz="2400" b="0" u="none" strike="noStrike">
-              <a:solidFill>
-                <a:schemeClr val="dk1"/>
-              </a:solidFill>
-              <a:effectLst/>
-              <a:uFillTx/>
-              <a:latin typeface="Calibri"/>
+            <a:endParaRPr lang="en-US" sz="2800" b="0" u="none" strike="noStrike">
+              <a:solidFill>
+                <a:srgbClr val="000000"/>
+              </a:solidFill>
+              <a:effectLst/>
+              <a:uFillTx/>
+              <a:latin typeface="Arial"/>
             </a:endParaRPr>
           </a:p>
           <a:p>
@@ -1901,23 +2060,23 @@
               <a:buChar char=""/>
             </a:pPr>
             <a:r>
-              <a:rPr lang="en-US" sz="2000" b="0" u="none" strike="noStrike">
-                <a:solidFill>
-                  <a:schemeClr val="dk1"/>
-                </a:solidFill>
-                <a:effectLst/>
-                <a:uFillTx/>
-                <a:latin typeface="Calibri"/>
+              <a:rPr lang="en-US" sz="2400" b="0" u="none" strike="noStrike">
+                <a:solidFill>
+                  <a:srgbClr val="000000"/>
+                </a:solidFill>
+                <a:effectLst/>
+                <a:uFillTx/>
+                <a:latin typeface="Arial"/>
               </a:rPr>
               <a:t>Third Outline Level</a:t>
             </a:r>
-            <a:endParaRPr lang="en-US" sz="2000" b="0" u="none" strike="noStrike">
-              <a:solidFill>
-                <a:schemeClr val="dk1"/>
-              </a:solidFill>
-              <a:effectLst/>
-              <a:uFillTx/>
-              <a:latin typeface="Calibri"/>
+            <a:endParaRPr lang="en-US" sz="2400" b="0" u="none" strike="noStrike">
+              <a:solidFill>
+                <a:srgbClr val="000000"/>
+              </a:solidFill>
+              <a:effectLst/>
+              <a:uFillTx/>
+              <a:latin typeface="Arial"/>
             </a:endParaRPr>
           </a:p>
           <a:p>
@@ -1935,21 +2094,21 @@
             <a:r>
               <a:rPr lang="en-US" sz="2000" b="0" u="none" strike="noStrike">
                 <a:solidFill>
-                  <a:schemeClr val="dk1"/>
-                </a:solidFill>
-                <a:effectLst/>
-                <a:uFillTx/>
-                <a:latin typeface="Calibri"/>
+                  <a:srgbClr val="000000"/>
+                </a:solidFill>
+                <a:effectLst/>
+                <a:uFillTx/>
+                <a:latin typeface="Arial"/>
               </a:rPr>
               <a:t>Fourth Outline Level</a:t>
             </a:r>
             <a:endParaRPr lang="en-US" sz="2000" b="0" u="none" strike="noStrike">
               <a:solidFill>
-                <a:schemeClr val="dk1"/>
-              </a:solidFill>
-              <a:effectLst/>
-              <a:uFillTx/>
-              <a:latin typeface="Calibri"/>
+                <a:srgbClr val="000000"/>
+              </a:solidFill>
+              <a:effectLst/>
+              <a:uFillTx/>
+              <a:latin typeface="Arial"/>
             </a:endParaRPr>
           </a:p>
           <a:p>
@@ -1967,21 +2126,21 @@
             <a:r>
               <a:rPr lang="en-US" sz="2000" b="0" u="none" strike="noStrike">
                 <a:solidFill>
-                  <a:schemeClr val="dk1"/>
-                </a:solidFill>
-                <a:effectLst/>
-                <a:uFillTx/>
-                <a:latin typeface="Calibri"/>
+                  <a:srgbClr val="000000"/>
+                </a:solidFill>
+                <a:effectLst/>
+                <a:uFillTx/>
+                <a:latin typeface="Arial"/>
               </a:rPr>
               <a:t>Fifth Outline Level</a:t>
             </a:r>
             <a:endParaRPr lang="en-US" sz="2000" b="0" u="none" strike="noStrike">
               <a:solidFill>
-                <a:schemeClr val="dk1"/>
-              </a:solidFill>
-              <a:effectLst/>
-              <a:uFillTx/>
-              <a:latin typeface="Calibri"/>
+                <a:srgbClr val="000000"/>
+              </a:solidFill>
+              <a:effectLst/>
+              <a:uFillTx/>
+              <a:latin typeface="Arial"/>
             </a:endParaRPr>
           </a:p>
           <a:p>
@@ -1999,21 +2158,21 @@
             <a:r>
               <a:rPr lang="en-US" sz="2000" b="0" u="none" strike="noStrike">
                 <a:solidFill>
-                  <a:schemeClr val="dk1"/>
-                </a:solidFill>
-                <a:effectLst/>
-                <a:uFillTx/>
-                <a:latin typeface="Calibri"/>
+                  <a:srgbClr val="000000"/>
+                </a:solidFill>
+                <a:effectLst/>
+                <a:uFillTx/>
+                <a:latin typeface="Arial"/>
               </a:rPr>
               <a:t>Sixth Outline Level</a:t>
             </a:r>
             <a:endParaRPr lang="en-US" sz="2000" b="0" u="none" strike="noStrike">
               <a:solidFill>
-                <a:schemeClr val="dk1"/>
-              </a:solidFill>
-              <a:effectLst/>
-              <a:uFillTx/>
-              <a:latin typeface="Calibri"/>
+                <a:srgbClr val="000000"/>
+              </a:solidFill>
+              <a:effectLst/>
+              <a:uFillTx/>
+              <a:latin typeface="Arial"/>
             </a:endParaRPr>
           </a:p>
           <a:p>
@@ -2031,21 +2190,21 @@
             <a:r>
               <a:rPr lang="en-US" sz="2000" b="0" u="none" strike="noStrike">
                 <a:solidFill>
-                  <a:schemeClr val="dk1"/>
-                </a:solidFill>
-                <a:effectLst/>
-                <a:uFillTx/>
-                <a:latin typeface="Calibri"/>
+                  <a:srgbClr val="000000"/>
+                </a:solidFill>
+                <a:effectLst/>
+                <a:uFillTx/>
+                <a:latin typeface="Arial"/>
               </a:rPr>
               <a:t>Seventh Outline Level</a:t>
             </a:r>
             <a:endParaRPr lang="en-US" sz="2000" b="0" u="none" strike="noStrike">
               <a:solidFill>
-                <a:schemeClr val="dk1"/>
-              </a:solidFill>
-              <a:effectLst/>
-              <a:uFillTx/>
-              <a:latin typeface="Calibri"/>
+                <a:srgbClr val="000000"/>
+              </a:solidFill>
+              <a:effectLst/>
+              <a:uFillTx/>
+              <a:latin typeface="Arial"/>
             </a:endParaRPr>
           </a:p>
         </p:txBody>
@@ -2092,7 +2251,7 @@
         <p:spPr>
           <a:xfrm>
             <a:off x="7132320" y="-731520"/>
-            <a:ext cx="3657240" cy="3657240"/>
+            <a:ext cx="3656880" cy="3656880"/>
           </a:xfrm>
           <a:prstGeom prst="ellipse">
             <a:avLst/>
@@ -2122,6 +2281,11 @@
             <a:noAutofit/>
           </a:bodyPr>
           <a:p>
+            <a:pPr>
+              <a:lnSpc>
+                <a:spcPct val="100000"/>
+              </a:lnSpc>
+            </a:pPr>
             <a:endParaRPr lang="en-US" sz="1800" b="0" u="none" strike="noStrike">
               <a:solidFill>
                 <a:srgbClr val="000000"/>
@@ -2142,7 +2306,7 @@
         <p:spPr>
           <a:xfrm>
             <a:off x="-914400" y="3200400"/>
-            <a:ext cx="2742840" cy="2742840"/>
+            <a:ext cx="2742480" cy="2742480"/>
           </a:xfrm>
           <a:prstGeom prst="ellipse">
             <a:avLst/>
@@ -2172,6 +2336,11 @@
             <a:noAutofit/>
           </a:bodyPr>
           <a:p>
+            <a:pPr>
+              <a:lnSpc>
+                <a:spcPct val="100000"/>
+              </a:lnSpc>
+            </a:pPr>
             <a:endParaRPr lang="en-US" sz="1800" b="0" u="none" strike="noStrike">
               <a:solidFill>
                 <a:srgbClr val="000000"/>
@@ -2192,7 +2361,7 @@
         <p:spPr>
           <a:xfrm>
             <a:off x="548640" y="1005840"/>
-            <a:ext cx="7772040" cy="502560"/>
+            <a:ext cx="7771680" cy="502200"/>
           </a:xfrm>
           <a:prstGeom prst="rect">
             <a:avLst/>
@@ -2241,7 +2410,7 @@
         <p:spPr>
           <a:xfrm>
             <a:off x="548640" y="1508760"/>
-            <a:ext cx="7772040" cy="1828440"/>
+            <a:ext cx="7771680" cy="1828080"/>
           </a:xfrm>
           <a:prstGeom prst="rect">
             <a:avLst/>
@@ -2281,7 +2450,7 @@
               </a:rPr>
               <a:t>Sistem inteligent pentru Predicția Riscului de Diabet</a:t>
             </a:r>
-            <a:endParaRPr lang="en-US" sz="4000" b="1" u="none" strike="noStrike">
+            <a:endParaRPr lang="en-US" sz="4000" b="0" u="none" strike="noStrike">
               <a:solidFill>
                 <a:srgbClr val="ffffff"/>
               </a:solidFill>
@@ -2301,7 +2470,7 @@
         <p:spPr>
           <a:xfrm>
             <a:off x="548640" y="3520440"/>
-            <a:ext cx="8046360" cy="365400"/>
+            <a:ext cx="8046000" cy="365040"/>
           </a:xfrm>
           <a:prstGeom prst="rect">
             <a:avLst/>
@@ -2361,7 +2530,7 @@
         <p:spPr>
           <a:xfrm>
             <a:off x="548640" y="3977640"/>
-            <a:ext cx="1462680" cy="54360"/>
+            <a:ext cx="1462320" cy="54000"/>
           </a:xfrm>
           <a:prstGeom prst="rect">
             <a:avLst/>
@@ -2387,6 +2556,11 @@
             <a:noAutofit/>
           </a:bodyPr>
           <a:p>
+            <a:pPr>
+              <a:lnSpc>
+                <a:spcPct val="100000"/>
+              </a:lnSpc>
+            </a:pPr>
             <a:endParaRPr lang="en-US" sz="1800" b="0" u="none" strike="noStrike">
               <a:solidFill>
                 <a:srgbClr val="000000"/>
@@ -2444,7 +2618,7 @@
         <p:spPr>
           <a:xfrm>
             <a:off x="457200" y="274320"/>
-            <a:ext cx="8229240" cy="365400"/>
+            <a:ext cx="8228880" cy="365040"/>
           </a:xfrm>
           <a:prstGeom prst="rect">
             <a:avLst/>
@@ -2504,7 +2678,7 @@
         <p:spPr>
           <a:xfrm>
             <a:off x="457200" y="640080"/>
-            <a:ext cx="8229240" cy="594000"/>
+            <a:ext cx="8228880" cy="593640"/>
           </a:xfrm>
           <a:prstGeom prst="rect">
             <a:avLst/>
@@ -2564,7 +2738,7 @@
         <p:spPr>
           <a:xfrm>
             <a:off x="365760" y="1508760"/>
-            <a:ext cx="2651400" cy="2285640"/>
+            <a:ext cx="2651040" cy="2285280"/>
           </a:xfrm>
           <a:prstGeom prst="rect">
             <a:avLst/>
@@ -2592,6 +2766,11 @@
             <a:noAutofit/>
           </a:bodyPr>
           <a:p>
+            <a:pPr>
+              <a:lnSpc>
+                <a:spcPct val="100000"/>
+              </a:lnSpc>
+            </a:pPr>
             <a:endParaRPr lang="en-US" sz="1800" b="0" u="none" strike="noStrike">
               <a:solidFill>
                 <a:srgbClr val="ffffff"/>
@@ -2612,7 +2791,7 @@
         <p:spPr>
           <a:xfrm>
             <a:off x="365760" y="1508760"/>
-            <a:ext cx="63720" cy="2285640"/>
+            <a:ext cx="63360" cy="2285280"/>
           </a:xfrm>
           <a:prstGeom prst="rect">
             <a:avLst/>
@@ -2638,6 +2817,11 @@
             <a:noAutofit/>
           </a:bodyPr>
           <a:p>
+            <a:pPr>
+              <a:lnSpc>
+                <a:spcPct val="100000"/>
+              </a:lnSpc>
+            </a:pPr>
             <a:endParaRPr lang="en-US" sz="1800" b="0" u="none" strike="noStrike">
               <a:solidFill>
                 <a:srgbClr val="000000"/>
@@ -2658,7 +2842,7 @@
         <p:spPr>
           <a:xfrm>
             <a:off x="530280" y="1691640"/>
-            <a:ext cx="2377080" cy="685440"/>
+            <a:ext cx="2376720" cy="685080"/>
           </a:xfrm>
           <a:prstGeom prst="rect">
             <a:avLst/>
@@ -2718,7 +2902,7 @@
         <p:spPr>
           <a:xfrm>
             <a:off x="530280" y="2423160"/>
-            <a:ext cx="2395440" cy="1005480"/>
+            <a:ext cx="2395080" cy="1005120"/>
           </a:xfrm>
           <a:prstGeom prst="rect">
             <a:avLst/>
@@ -2807,7 +2991,7 @@
         <p:spPr>
           <a:xfrm>
             <a:off x="3291840" y="1508760"/>
-            <a:ext cx="2651400" cy="2285640"/>
+            <a:ext cx="2651040" cy="2285280"/>
           </a:xfrm>
           <a:prstGeom prst="rect">
             <a:avLst/>
@@ -2835,6 +3019,11 @@
             <a:noAutofit/>
           </a:bodyPr>
           <a:p>
+            <a:pPr>
+              <a:lnSpc>
+                <a:spcPct val="100000"/>
+              </a:lnSpc>
+            </a:pPr>
             <a:endParaRPr lang="en-US" sz="1800" b="0" u="none" strike="noStrike">
               <a:solidFill>
                 <a:srgbClr val="ffffff"/>
@@ -2855,7 +3044,7 @@
         <p:spPr>
           <a:xfrm>
             <a:off x="3291840" y="1508760"/>
-            <a:ext cx="63720" cy="2285640"/>
+            <a:ext cx="63360" cy="2285280"/>
           </a:xfrm>
           <a:prstGeom prst="rect">
             <a:avLst/>
@@ -2881,6 +3070,11 @@
             <a:noAutofit/>
           </a:bodyPr>
           <a:p>
+            <a:pPr>
+              <a:lnSpc>
+                <a:spcPct val="100000"/>
+              </a:lnSpc>
+            </a:pPr>
             <a:endParaRPr lang="en-US" sz="1800" b="0" u="none" strike="noStrike">
               <a:solidFill>
                 <a:srgbClr val="000000"/>
@@ -2901,7 +3095,7 @@
         <p:spPr>
           <a:xfrm>
             <a:off x="3456360" y="1691640"/>
-            <a:ext cx="2377080" cy="685440"/>
+            <a:ext cx="2376720" cy="685080"/>
           </a:xfrm>
           <a:prstGeom prst="rect">
             <a:avLst/>
@@ -2961,7 +3155,7 @@
         <p:spPr>
           <a:xfrm>
             <a:off x="3456360" y="2423160"/>
-            <a:ext cx="2395440" cy="1005480"/>
+            <a:ext cx="2395080" cy="1005120"/>
           </a:xfrm>
           <a:prstGeom prst="rect">
             <a:avLst/>
@@ -3050,7 +3244,7 @@
         <p:spPr>
           <a:xfrm>
             <a:off x="6217920" y="1508760"/>
-            <a:ext cx="2651400" cy="2285640"/>
+            <a:ext cx="2651040" cy="2285280"/>
           </a:xfrm>
           <a:prstGeom prst="rect">
             <a:avLst/>
@@ -3078,6 +3272,11 @@
             <a:noAutofit/>
           </a:bodyPr>
           <a:p>
+            <a:pPr>
+              <a:lnSpc>
+                <a:spcPct val="100000"/>
+              </a:lnSpc>
+            </a:pPr>
             <a:endParaRPr lang="en-US" sz="1800" b="0" u="none" strike="noStrike">
               <a:solidFill>
                 <a:srgbClr val="ffffff"/>
@@ -3098,7 +3297,7 @@
         <p:spPr>
           <a:xfrm>
             <a:off x="6217920" y="1508760"/>
-            <a:ext cx="63720" cy="2285640"/>
+            <a:ext cx="63360" cy="2285280"/>
           </a:xfrm>
           <a:prstGeom prst="rect">
             <a:avLst/>
@@ -3124,6 +3323,11 @@
             <a:noAutofit/>
           </a:bodyPr>
           <a:p>
+            <a:pPr>
+              <a:lnSpc>
+                <a:spcPct val="100000"/>
+              </a:lnSpc>
+            </a:pPr>
             <a:endParaRPr lang="en-US" sz="1800" b="0" u="none" strike="noStrike">
               <a:solidFill>
                 <a:srgbClr val="000000"/>
@@ -3144,7 +3348,7 @@
         <p:spPr>
           <a:xfrm>
             <a:off x="6382440" y="1691640"/>
-            <a:ext cx="2377080" cy="685440"/>
+            <a:ext cx="2376720" cy="685080"/>
           </a:xfrm>
           <a:prstGeom prst="rect">
             <a:avLst/>
@@ -3204,7 +3408,7 @@
         <p:spPr>
           <a:xfrm>
             <a:off x="6382440" y="2423160"/>
-            <a:ext cx="2395440" cy="1005480"/>
+            <a:ext cx="2395080" cy="1005120"/>
           </a:xfrm>
           <a:prstGeom prst="rect">
             <a:avLst/>
@@ -3264,7 +3468,7 @@
         <p:spPr>
           <a:xfrm>
             <a:off x="457200" y="4114800"/>
-            <a:ext cx="8229240" cy="685440"/>
+            <a:ext cx="8228880" cy="685080"/>
           </a:xfrm>
           <a:prstGeom prst="rect">
             <a:avLst/>
@@ -3302,7 +3506,7 @@
                 <a:uFillTx/>
                 <a:latin typeface="Calibri"/>
               </a:rPr>
-              <a:t>Scopul: evaluare comparativă a algoritmilor ML pentru screening clinic non-invaziv pe setul PIDD (768 paciente).</a:t>
+              <a:t>Scopul: evaluare comparativă a algoritmilor ML pentru screening clinic non-invaziv.</a:t>
             </a:r>
             <a:endParaRPr lang="en-US" sz="1300" b="0" u="none" strike="noStrike">
               <a:solidFill>
@@ -3361,7 +3565,7 @@
         <p:spPr>
           <a:xfrm>
             <a:off x="457200" y="274320"/>
-            <a:ext cx="8229240" cy="365400"/>
+            <a:ext cx="8228880" cy="365040"/>
           </a:xfrm>
           <a:prstGeom prst="rect">
             <a:avLst/>
@@ -3421,7 +3625,7 @@
         <p:spPr>
           <a:xfrm>
             <a:off x="457200" y="640080"/>
-            <a:ext cx="8229240" cy="548280"/>
+            <a:ext cx="8228880" cy="547920"/>
           </a:xfrm>
           <a:prstGeom prst="rect">
             <a:avLst/>
@@ -3481,7 +3685,7 @@
         <p:spPr>
           <a:xfrm>
             <a:off x="365760" y="1417320"/>
-            <a:ext cx="4023000" cy="3291480"/>
+            <a:ext cx="4022640" cy="3291120"/>
           </a:xfrm>
           <a:prstGeom prst="rect">
             <a:avLst/>
@@ -3507,6 +3711,11 @@
             <a:noAutofit/>
           </a:bodyPr>
           <a:p>
+            <a:pPr>
+              <a:lnSpc>
+                <a:spcPct val="100000"/>
+              </a:lnSpc>
+            </a:pPr>
             <a:endParaRPr lang="en-US" sz="1800" b="0" u="none" strike="noStrike">
               <a:solidFill>
                 <a:srgbClr val="ffffff"/>
@@ -3527,7 +3736,7 @@
         <p:spPr>
           <a:xfrm>
             <a:off x="502920" y="1554480"/>
-            <a:ext cx="3657240" cy="365400"/>
+            <a:ext cx="3656880" cy="365040"/>
           </a:xfrm>
           <a:prstGeom prst="rect">
             <a:avLst/>
@@ -3587,7 +3796,7 @@
         <p:spPr>
           <a:xfrm>
             <a:off x="502920" y="2011680"/>
-            <a:ext cx="3748680" cy="2468520"/>
+            <a:ext cx="3748320" cy="2468160"/>
           </a:xfrm>
           <a:prstGeom prst="rect">
             <a:avLst/>
@@ -3850,7 +4059,7 @@
         <p:spPr>
           <a:xfrm>
             <a:off x="4663440" y="1417320"/>
-            <a:ext cx="4114440" cy="3291480"/>
+            <a:ext cx="4114080" cy="3291120"/>
           </a:xfrm>
           <a:prstGeom prst="rect">
             <a:avLst/>
@@ -3876,6 +4085,11 @@
             <a:noAutofit/>
           </a:bodyPr>
           <a:p>
+            <a:pPr>
+              <a:lnSpc>
+                <a:spcPct val="100000"/>
+              </a:lnSpc>
+            </a:pPr>
             <a:endParaRPr lang="en-US" sz="1800" b="0" u="none" strike="noStrike">
               <a:solidFill>
                 <a:srgbClr val="ffffff"/>
@@ -3896,7 +4110,7 @@
         <p:spPr>
           <a:xfrm>
             <a:off x="4800600" y="1554480"/>
-            <a:ext cx="3657240" cy="365400"/>
+            <a:ext cx="3656880" cy="365040"/>
           </a:xfrm>
           <a:prstGeom prst="rect">
             <a:avLst/>
@@ -3956,7 +4170,7 @@
         <p:spPr>
           <a:xfrm>
             <a:off x="4800600" y="2057400"/>
-            <a:ext cx="319680" cy="319680"/>
+            <a:ext cx="319320" cy="319320"/>
           </a:xfrm>
           <a:prstGeom prst="ellipse">
             <a:avLst/>
@@ -3982,6 +4196,11 @@
             <a:noAutofit/>
           </a:bodyPr>
           <a:p>
+            <a:pPr>
+              <a:lnSpc>
+                <a:spcPct val="100000"/>
+              </a:lnSpc>
+            </a:pPr>
             <a:endParaRPr lang="en-US" sz="1800" b="0" u="none" strike="noStrike">
               <a:solidFill>
                 <a:srgbClr val="000000"/>
@@ -4002,7 +4221,7 @@
         <p:spPr>
           <a:xfrm>
             <a:off x="4800600" y="2039040"/>
-            <a:ext cx="319680" cy="347040"/>
+            <a:ext cx="319320" cy="346680"/>
           </a:xfrm>
           <a:prstGeom prst="rect">
             <a:avLst/>
@@ -4062,7 +4281,7 @@
         <p:spPr>
           <a:xfrm>
             <a:off x="5193720" y="2011680"/>
-            <a:ext cx="3382920" cy="319680"/>
+            <a:ext cx="3382560" cy="319320"/>
           </a:xfrm>
           <a:prstGeom prst="rect">
             <a:avLst/>
@@ -4122,7 +4341,7 @@
         <p:spPr>
           <a:xfrm>
             <a:off x="5193720" y="2331720"/>
-            <a:ext cx="3382920" cy="411120"/>
+            <a:ext cx="3382560" cy="410760"/>
           </a:xfrm>
           <a:prstGeom prst="rect">
             <a:avLst/>
@@ -4182,7 +4401,7 @@
         <p:spPr>
           <a:xfrm>
             <a:off x="4800600" y="2926080"/>
-            <a:ext cx="319680" cy="319680"/>
+            <a:ext cx="319320" cy="319320"/>
           </a:xfrm>
           <a:prstGeom prst="ellipse">
             <a:avLst/>
@@ -4208,6 +4427,11 @@
             <a:noAutofit/>
           </a:bodyPr>
           <a:p>
+            <a:pPr>
+              <a:lnSpc>
+                <a:spcPct val="100000"/>
+              </a:lnSpc>
+            </a:pPr>
             <a:endParaRPr lang="en-US" sz="1800" b="0" u="none" strike="noStrike">
               <a:solidFill>
                 <a:srgbClr val="000000"/>
@@ -4228,7 +4452,7 @@
         <p:spPr>
           <a:xfrm>
             <a:off x="4800600" y="2907720"/>
-            <a:ext cx="319680" cy="347040"/>
+            <a:ext cx="319320" cy="346680"/>
           </a:xfrm>
           <a:prstGeom prst="rect">
             <a:avLst/>
@@ -4288,7 +4512,7 @@
         <p:spPr>
           <a:xfrm>
             <a:off x="5193720" y="2880360"/>
-            <a:ext cx="3382920" cy="319680"/>
+            <a:ext cx="3382560" cy="319320"/>
           </a:xfrm>
           <a:prstGeom prst="rect">
             <a:avLst/>
@@ -4348,7 +4572,7 @@
         <p:spPr>
           <a:xfrm>
             <a:off x="5193720" y="3200400"/>
-            <a:ext cx="3382920" cy="411120"/>
+            <a:ext cx="3382560" cy="410760"/>
           </a:xfrm>
           <a:prstGeom prst="rect">
             <a:avLst/>
@@ -4408,7 +4632,7 @@
         <p:spPr>
           <a:xfrm>
             <a:off x="4800600" y="3794760"/>
-            <a:ext cx="319680" cy="319680"/>
+            <a:ext cx="319320" cy="319320"/>
           </a:xfrm>
           <a:prstGeom prst="ellipse">
             <a:avLst/>
@@ -4434,6 +4658,11 @@
             <a:noAutofit/>
           </a:bodyPr>
           <a:p>
+            <a:pPr>
+              <a:lnSpc>
+                <a:spcPct val="100000"/>
+              </a:lnSpc>
+            </a:pPr>
             <a:endParaRPr lang="en-US" sz="1800" b="0" u="none" strike="noStrike">
               <a:solidFill>
                 <a:srgbClr val="000000"/>
@@ -4454,7 +4683,7 @@
         <p:spPr>
           <a:xfrm>
             <a:off x="4800600" y="3776400"/>
-            <a:ext cx="319680" cy="347040"/>
+            <a:ext cx="319320" cy="346680"/>
           </a:xfrm>
           <a:prstGeom prst="rect">
             <a:avLst/>
@@ -4514,7 +4743,7 @@
         <p:spPr>
           <a:xfrm>
             <a:off x="5193720" y="3749040"/>
-            <a:ext cx="3382920" cy="319680"/>
+            <a:ext cx="3382560" cy="319320"/>
           </a:xfrm>
           <a:prstGeom prst="rect">
             <a:avLst/>
@@ -4574,7 +4803,7 @@
         <p:spPr>
           <a:xfrm>
             <a:off x="5193720" y="4069080"/>
-            <a:ext cx="3382920" cy="411120"/>
+            <a:ext cx="3382560" cy="410760"/>
           </a:xfrm>
           <a:prstGeom prst="rect">
             <a:avLst/>
@@ -4671,7 +4900,7 @@
         <p:spPr>
           <a:xfrm>
             <a:off x="457200" y="274320"/>
-            <a:ext cx="8229240" cy="365400"/>
+            <a:ext cx="8228880" cy="365040"/>
           </a:xfrm>
           <a:prstGeom prst="rect">
             <a:avLst/>
@@ -4731,7 +4960,7 @@
         <p:spPr>
           <a:xfrm>
             <a:off x="457200" y="640080"/>
-            <a:ext cx="8229240" cy="548280"/>
+            <a:ext cx="8228880" cy="547920"/>
           </a:xfrm>
           <a:prstGeom prst="rect">
             <a:avLst/>
@@ -4791,7 +5020,7 @@
         <p:spPr>
           <a:xfrm>
             <a:off x="320040" y="1417320"/>
-            <a:ext cx="2697120" cy="3291480"/>
+            <a:ext cx="2696760" cy="3291120"/>
           </a:xfrm>
           <a:prstGeom prst="rect">
             <a:avLst/>
@@ -4817,6 +5046,11 @@
             <a:noAutofit/>
           </a:bodyPr>
           <a:p>
+            <a:pPr>
+              <a:lnSpc>
+                <a:spcPct val="100000"/>
+              </a:lnSpc>
+            </a:pPr>
             <a:endParaRPr lang="en-US" sz="1800" b="0" u="none" strike="noStrike">
               <a:solidFill>
                 <a:srgbClr val="ffffff"/>
@@ -4837,7 +5071,7 @@
         <p:spPr>
           <a:xfrm>
             <a:off x="457200" y="2286000"/>
-            <a:ext cx="2422800" cy="502560"/>
+            <a:ext cx="2422440" cy="502200"/>
           </a:xfrm>
           <a:prstGeom prst="rect">
             <a:avLst/>
@@ -4886,7 +5120,7 @@
         <p:spPr>
           <a:xfrm>
             <a:off x="457200" y="2286000"/>
-            <a:ext cx="2422800" cy="2194200"/>
+            <a:ext cx="2422440" cy="2193840"/>
           </a:xfrm>
           <a:prstGeom prst="rect">
             <a:avLst/>
@@ -4975,7 +5209,7 @@
         <p:spPr>
           <a:xfrm>
             <a:off x="3246120" y="1417320"/>
-            <a:ext cx="2697120" cy="3291480"/>
+            <a:ext cx="2696760" cy="3291120"/>
           </a:xfrm>
           <a:prstGeom prst="rect">
             <a:avLst/>
@@ -5001,6 +5235,11 @@
             <a:noAutofit/>
           </a:bodyPr>
           <a:p>
+            <a:pPr>
+              <a:lnSpc>
+                <a:spcPct val="100000"/>
+              </a:lnSpc>
+            </a:pPr>
             <a:endParaRPr lang="en-US" sz="1800" b="0" u="none" strike="noStrike">
               <a:solidFill>
                 <a:srgbClr val="ffffff"/>
@@ -5021,7 +5260,7 @@
         <p:spPr>
           <a:xfrm>
             <a:off x="3383280" y="2286000"/>
-            <a:ext cx="2422800" cy="502560"/>
+            <a:ext cx="2422440" cy="502200"/>
           </a:xfrm>
           <a:prstGeom prst="rect">
             <a:avLst/>
@@ -5070,7 +5309,7 @@
         <p:spPr>
           <a:xfrm>
             <a:off x="3429000" y="2057400"/>
-            <a:ext cx="2377080" cy="2422800"/>
+            <a:ext cx="2376720" cy="2422440"/>
           </a:xfrm>
           <a:prstGeom prst="rect">
             <a:avLst/>
@@ -5159,7 +5398,7 @@
         <p:spPr>
           <a:xfrm>
             <a:off x="6172200" y="1417320"/>
-            <a:ext cx="2697120" cy="3291480"/>
+            <a:ext cx="2696760" cy="3291120"/>
           </a:xfrm>
           <a:prstGeom prst="rect">
             <a:avLst/>
@@ -5185,6 +5424,11 @@
             <a:noAutofit/>
           </a:bodyPr>
           <a:p>
+            <a:pPr>
+              <a:lnSpc>
+                <a:spcPct val="100000"/>
+              </a:lnSpc>
+            </a:pPr>
             <a:endParaRPr lang="en-US" sz="1800" b="0" u="none" strike="noStrike">
               <a:solidFill>
                 <a:srgbClr val="ffffff"/>
@@ -5205,7 +5449,7 @@
         <p:spPr>
           <a:xfrm>
             <a:off x="6172200" y="1417320"/>
-            <a:ext cx="2697120" cy="63720"/>
+            <a:ext cx="2696760" cy="63360"/>
           </a:xfrm>
           <a:prstGeom prst="rect">
             <a:avLst/>
@@ -5231,6 +5475,11 @@
             <a:noAutofit/>
           </a:bodyPr>
           <a:p>
+            <a:pPr>
+              <a:lnSpc>
+                <a:spcPct val="100000"/>
+              </a:lnSpc>
+            </a:pPr>
             <a:endParaRPr lang="en-US" sz="1800" b="0" u="none" strike="noStrike">
               <a:solidFill>
                 <a:srgbClr val="000000"/>
@@ -5251,7 +5500,7 @@
         <p:spPr>
           <a:xfrm>
             <a:off x="6309360" y="1600200"/>
-            <a:ext cx="2422800" cy="639720"/>
+            <a:ext cx="2422440" cy="639360"/>
           </a:xfrm>
           <a:prstGeom prst="rect">
             <a:avLst/>
@@ -5300,7 +5549,7 @@
         <p:spPr>
           <a:xfrm>
             <a:off x="6400800" y="2057400"/>
-            <a:ext cx="2331360" cy="2422800"/>
+            <a:ext cx="2331000" cy="2422440"/>
           </a:xfrm>
           <a:prstGeom prst="rect">
             <a:avLst/>
@@ -5418,7 +5667,7 @@
         <p:spPr>
           <a:xfrm>
             <a:off x="457200" y="4754880"/>
-            <a:ext cx="8229240" cy="319680"/>
+            <a:ext cx="8228880" cy="319320"/>
           </a:xfrm>
           <a:prstGeom prst="rect">
             <a:avLst/>
@@ -5472,13 +5721,13 @@
       <p:sp>
         <p:nvSpPr>
           <p:cNvPr id="63" name=""/>
-          <p:cNvSpPr txBox="1"/>
+          <p:cNvSpPr/>
           <p:nvPr/>
         </p:nvSpPr>
         <p:spPr>
           <a:xfrm>
             <a:off x="457200" y="1627200"/>
-            <a:ext cx="2514600" cy="430200"/>
+            <a:ext cx="2514240" cy="429840"/>
           </a:xfrm>
           <a:prstGeom prst="rect">
             <a:avLst/>
@@ -5488,11 +5737,22 @@
             <a:noFill/>
           </a:ln>
         </p:spPr>
+        <p:style>
+          <a:lnRef idx="0"/>
+          <a:fillRef idx="0"/>
+          <a:effectRef idx="0"/>
+          <a:fontRef idx="minor"/>
+        </p:style>
         <p:txBody>
           <a:bodyPr lIns="90000" rIns="90000" tIns="45000" bIns="45000" anchor="t">
             <a:spAutoFit/>
           </a:bodyPr>
           <a:p>
+            <a:pPr>
+              <a:lnSpc>
+                <a:spcPct val="100000"/>
+              </a:lnSpc>
+            </a:pPr>
             <a:r>
               <a:rPr lang="en-US" sz="2200" b="1" u="none" strike="noStrike">
                 <a:solidFill>
@@ -5518,13 +5778,13 @@
       <p:sp>
         <p:nvSpPr>
           <p:cNvPr id="64" name=""/>
-          <p:cNvSpPr txBox="1"/>
+          <p:cNvSpPr/>
           <p:nvPr/>
         </p:nvSpPr>
         <p:spPr>
           <a:xfrm>
             <a:off x="3291480" y="1627200"/>
-            <a:ext cx="2514600" cy="430200"/>
+            <a:ext cx="2514240" cy="429840"/>
           </a:xfrm>
           <a:prstGeom prst="rect">
             <a:avLst/>
@@ -5534,6 +5794,12 @@
             <a:noFill/>
           </a:ln>
         </p:spPr>
+        <p:style>
+          <a:lnRef idx="0"/>
+          <a:fillRef idx="0"/>
+          <a:effectRef idx="0"/>
+          <a:fontRef idx="minor"/>
+        </p:style>
         <p:txBody>
           <a:bodyPr lIns="90000" rIns="90000" tIns="45000" bIns="45000" anchor="t">
             <a:spAutoFit/>
@@ -5556,18 +5822,7 @@
                 <a:uFillTx/>
                 <a:latin typeface="Calibri"/>
               </a:rPr>
-              <a:t>Arbore de </a:t>
-            </a:r>
-            <a:r>
-              <a:rPr lang="en-US" sz="2200" b="1" u="none" strike="noStrike">
-                <a:solidFill>
-                  <a:srgbClr val="ffffff"/>
-                </a:solidFill>
-                <a:effectLst/>
-                <a:uFillTx/>
-                <a:latin typeface="Calibri"/>
-              </a:rPr>
-              <a:t>Decizie</a:t>
+              <a:t>Arbore de Decizie</a:t>
             </a:r>
             <a:endParaRPr lang="en-US" sz="2200" b="0" u="none" strike="noStrike">
               <a:solidFill>
@@ -5583,13 +5838,13 @@
       <p:sp>
         <p:nvSpPr>
           <p:cNvPr id="65" name=""/>
-          <p:cNvSpPr txBox="1"/>
+          <p:cNvSpPr/>
           <p:nvPr/>
         </p:nvSpPr>
         <p:spPr>
           <a:xfrm>
             <a:off x="6309360" y="1627200"/>
-            <a:ext cx="2514600" cy="430200"/>
+            <a:ext cx="2514240" cy="429840"/>
           </a:xfrm>
           <a:prstGeom prst="rect">
             <a:avLst/>
@@ -5599,6 +5854,12 @@
             <a:noFill/>
           </a:ln>
         </p:spPr>
+        <p:style>
+          <a:lnRef idx="0"/>
+          <a:fillRef idx="0"/>
+          <a:effectRef idx="0"/>
+          <a:fontRef idx="minor"/>
+        </p:style>
         <p:txBody>
           <a:bodyPr lIns="90000" rIns="90000" tIns="45000" bIns="45000" anchor="t">
             <a:spAutoFit/>
@@ -5680,7 +5941,7 @@
         <p:spPr>
           <a:xfrm>
             <a:off x="457200" y="274320"/>
-            <a:ext cx="8229240" cy="365400"/>
+            <a:ext cx="8228880" cy="365040"/>
           </a:xfrm>
           <a:prstGeom prst="rect">
             <a:avLst/>
@@ -5740,7 +6001,7 @@
         <p:spPr>
           <a:xfrm>
             <a:off x="457200" y="640080"/>
-            <a:ext cx="8229240" cy="502560"/>
+            <a:ext cx="8228880" cy="502200"/>
           </a:xfrm>
           <a:prstGeom prst="rect">
             <a:avLst/>
@@ -5799,7 +6060,7 @@
         </p:nvGraphicFramePr>
         <p:xfrm>
           <a:off x="365760" y="1371600"/>
-          <a:ext cx="8412120" cy="3474360"/>
+          <a:ext cx="8412120" cy="3472560"/>
         </p:xfrm>
         <a:graphic>
           <a:graphicData uri="http://schemas.openxmlformats.org/drawingml/2006/table">
@@ -5901,7 +6162,7 @@
                           <a:uFillTx/>
                           <a:latin typeface="Calibri"/>
                         </a:rPr>
-                        <a:t>Model</a:t>
+                        <a:t>Model Câștigător</a:t>
                       </a:r>
                       <a:endParaRPr lang="en-US" sz="1100" b="0" u="none" strike="noStrike">
                         <a:solidFill>
@@ -6491,18 +6752,7 @@
                           <a:latin typeface="Calibri"/>
                           <a:ea typeface="Noto Sans CJK SC"/>
                         </a:rPr>
-                        <a:t>Zou et al. (2018) </a:t>
-                      </a:r>
-                      <a:r>
-                        <a:rPr lang="en-US" sz="1100" b="0" u="none" strike="noStrike">
-                          <a:solidFill>
-                            <a:srgbClr val="94a3b8"/>
-                          </a:solidFill>
-                          <a:effectLst/>
-                          <a:uFillTx/>
-                          <a:latin typeface="Calibri"/>
-                        </a:rPr>
-                        <a:t>- PIDD</a:t>
+                        <a:t>Zou et al. (2018) - PIDD</a:t>
                       </a:r>
                       <a:endParaRPr lang="en-US" sz="1100" b="0" u="none" strike="noStrike">
                         <a:solidFill>
@@ -6830,18 +7080,7 @@
                           <a:latin typeface="Calibri"/>
                           <a:ea typeface="Noto Sans CJK SC"/>
                         </a:rPr>
-                        <a:t>Butt et al. (2021) </a:t>
-                      </a:r>
-                      <a:r>
-                        <a:rPr lang="en-US" sz="1100" b="0" u="none" strike="noStrike">
-                          <a:solidFill>
-                            <a:srgbClr val="94a3b8"/>
-                          </a:solidFill>
-                          <a:effectLst/>
-                          <a:uFillTx/>
-                          <a:latin typeface="Calibri"/>
-                        </a:rPr>
-                        <a:t>- PIDD</a:t>
+                        <a:t>Butt et al. (2021) - PIDD</a:t>
                       </a:r>
                       <a:endParaRPr lang="en-US" sz="1100" b="0" u="none" strike="noStrike">
                         <a:solidFill>
@@ -7169,18 +7408,7 @@
                           <a:latin typeface="Calibri"/>
                           <a:ea typeface="Noto Sans CJK SC"/>
                         </a:rPr>
-                        <a:t>Bhatta &amp; Husain (2026) </a:t>
-                      </a:r>
-                      <a:r>
-                        <a:rPr lang="en-US" sz="1100" b="0" u="none" strike="noStrike">
-                          <a:solidFill>
-                            <a:srgbClr val="94a3b8"/>
-                          </a:solidFill>
-                          <a:effectLst/>
-                          <a:uFillTx/>
-                          <a:latin typeface="Calibri"/>
-                        </a:rPr>
-                        <a:t>- PIDD</a:t>
+                        <a:t>Bhatta &amp; Husain (2026) - PIDD</a:t>
                       </a:r>
                       <a:endParaRPr lang="en-US" sz="1100" b="0" u="none" strike="noStrike">
                         <a:solidFill>
@@ -7508,18 +7736,7 @@
                           <a:latin typeface="Calibri"/>
                           <a:ea typeface="Noto Sans CJK SC"/>
                         </a:rPr>
-                        <a:t>Sahebhonar et al. (2022) –</a:t>
-                      </a:r>
-                      <a:r>
-                        <a:rPr lang="en-US" sz="1100" b="0" u="none" strike="noStrike">
-                          <a:solidFill>
-                            <a:srgbClr val="94a3b8"/>
-                          </a:solidFill>
-                          <a:effectLst/>
-                          <a:uFillTx/>
-                          <a:latin typeface="Calibri"/>
-                        </a:rPr>
-                        <a:t> set de date pe militari iraniei.</a:t>
+                        <a:t>Sahebhonar et al. (2022) – set de date pe militari iranieni.</a:t>
                       </a:r>
                       <a:endParaRPr lang="en-US" sz="1100" b="0" u="none" strike="noStrike">
                         <a:solidFill>
@@ -7592,7 +7809,7 @@
                         </a:solidFill>
                         <a:effectLst/>
                         <a:uFillTx/>
-                        <a:latin typeface="Times New Roman"/>
+                        <a:latin typeface="Arial"/>
                       </a:endParaRPr>
                     </a:p>
                   </a:txBody>
@@ -7657,7 +7874,7 @@
                         </a:solidFill>
                         <a:effectLst/>
                         <a:uFillTx/>
-                        <a:latin typeface="Times New Roman"/>
+                        <a:latin typeface="Arial"/>
                       </a:endParaRPr>
                     </a:p>
                   </a:txBody>
@@ -7722,7 +7939,7 @@
                         </a:solidFill>
                         <a:effectLst/>
                         <a:uFillTx/>
-                        <a:latin typeface="Times New Roman"/>
+                        <a:latin typeface="Arial"/>
                       </a:endParaRPr>
                     </a:p>
                   </a:txBody>
@@ -7762,6 +7979,11 @@
                       <a:noAutofit/>
                     </a:bodyPr>
                     <a:p>
+                      <a:pPr>
+                        <a:lnSpc>
+                          <a:spcPct val="100000"/>
+                        </a:lnSpc>
+                      </a:pPr>
                       <a:r>
                         <a:rPr lang="en-US" sz="1100" b="0" u="none" strike="noStrike">
                           <a:solidFill>
@@ -7839,18 +8061,7 @@
                           <a:latin typeface="Calibri"/>
                           <a:ea typeface="Noto Sans CJK SC"/>
                         </a:rPr>
-                        <a:t>Zhang et al. (2024) </a:t>
-                      </a:r>
-                      <a:r>
-                        <a:rPr lang="en-US" sz="1100" b="0" u="none" strike="noStrike">
-                          <a:solidFill>
-                            <a:srgbClr val="94a3b8"/>
-                          </a:solidFill>
-                          <a:effectLst/>
-                          <a:uFillTx/>
-                          <a:latin typeface="Calibri"/>
-                        </a:rPr>
-                        <a:t>- PIDD</a:t>
+                        <a:t>Zhang et al. (2024) - PIDD</a:t>
                       </a:r>
                       <a:endParaRPr lang="en-US" sz="1100" b="0" u="none" strike="noStrike">
                         <a:solidFill>
@@ -8166,7 +8377,7 @@
         <p:spPr>
           <a:xfrm>
             <a:off x="457200" y="4846320"/>
-            <a:ext cx="8229240" cy="255600"/>
+            <a:ext cx="8228880" cy="255240"/>
           </a:xfrm>
           <a:prstGeom prst="rect">
             <a:avLst/>
@@ -8263,7 +8474,7 @@
         <p:spPr>
           <a:xfrm>
             <a:off x="457200" y="274320"/>
-            <a:ext cx="8229240" cy="365400"/>
+            <a:ext cx="8228880" cy="365040"/>
           </a:xfrm>
           <a:prstGeom prst="rect">
             <a:avLst/>
@@ -8312,7 +8523,7 @@
         <p:spPr>
           <a:xfrm>
             <a:off x="457200" y="640080"/>
-            <a:ext cx="8229240" cy="502560"/>
+            <a:ext cx="8228880" cy="502200"/>
           </a:xfrm>
           <a:prstGeom prst="rect">
             <a:avLst/>
@@ -8372,7 +8583,7 @@
         <p:spPr>
           <a:xfrm>
             <a:off x="365760" y="1417320"/>
-            <a:ext cx="8412120" cy="776880"/>
+            <a:ext cx="8411760" cy="776520"/>
           </a:xfrm>
           <a:prstGeom prst="rect">
             <a:avLst/>
@@ -8398,6 +8609,11 @@
             <a:noAutofit/>
           </a:bodyPr>
           <a:p>
+            <a:pPr>
+              <a:lnSpc>
+                <a:spcPct val="100000"/>
+              </a:lnSpc>
+            </a:pPr>
             <a:endParaRPr lang="en-US" sz="1800" b="0" u="none" strike="noStrike">
               <a:solidFill>
                 <a:srgbClr val="ffffff"/>
@@ -8418,7 +8634,7 @@
         <p:spPr>
           <a:xfrm>
             <a:off x="365760" y="1417320"/>
-            <a:ext cx="63720" cy="776880"/>
+            <a:ext cx="63360" cy="776520"/>
           </a:xfrm>
           <a:prstGeom prst="rect">
             <a:avLst/>
@@ -8444,6 +8660,11 @@
             <a:noAutofit/>
           </a:bodyPr>
           <a:p>
+            <a:pPr>
+              <a:lnSpc>
+                <a:spcPct val="100000"/>
+              </a:lnSpc>
+            </a:pPr>
             <a:endParaRPr lang="en-US" sz="1800" b="0" u="none" strike="noStrike">
               <a:solidFill>
                 <a:srgbClr val="000000"/>
@@ -8464,7 +8685,7 @@
         <p:spPr>
           <a:xfrm>
             <a:off x="548640" y="1472040"/>
-            <a:ext cx="8046360" cy="292320"/>
+            <a:ext cx="8046000" cy="291960"/>
           </a:xfrm>
           <a:prstGeom prst="rect">
             <a:avLst/>
@@ -8524,7 +8745,7 @@
         <p:spPr>
           <a:xfrm>
             <a:off x="548640" y="1801440"/>
-            <a:ext cx="8046360" cy="319680"/>
+            <a:ext cx="8046000" cy="319320"/>
           </a:xfrm>
           <a:prstGeom prst="rect">
             <a:avLst/>
@@ -8584,7 +8805,7 @@
         <p:spPr>
           <a:xfrm>
             <a:off x="365760" y="2286000"/>
-            <a:ext cx="8412120" cy="776880"/>
+            <a:ext cx="8411760" cy="776520"/>
           </a:xfrm>
           <a:prstGeom prst="rect">
             <a:avLst/>
@@ -8610,6 +8831,11 @@
             <a:noAutofit/>
           </a:bodyPr>
           <a:p>
+            <a:pPr>
+              <a:lnSpc>
+                <a:spcPct val="100000"/>
+              </a:lnSpc>
+            </a:pPr>
             <a:endParaRPr lang="en-US" sz="1800" b="0" u="none" strike="noStrike">
               <a:solidFill>
                 <a:srgbClr val="ffffff"/>
@@ -8630,7 +8856,7 @@
         <p:spPr>
           <a:xfrm>
             <a:off x="365760" y="2286000"/>
-            <a:ext cx="63720" cy="776880"/>
+            <a:ext cx="63360" cy="776520"/>
           </a:xfrm>
           <a:prstGeom prst="rect">
             <a:avLst/>
@@ -8656,6 +8882,11 @@
             <a:noAutofit/>
           </a:bodyPr>
           <a:p>
+            <a:pPr>
+              <a:lnSpc>
+                <a:spcPct val="100000"/>
+              </a:lnSpc>
+            </a:pPr>
             <a:endParaRPr lang="en-US" sz="1800" b="0" u="none" strike="noStrike">
               <a:solidFill>
                 <a:srgbClr val="000000"/>
@@ -8676,7 +8907,7 @@
         <p:spPr>
           <a:xfrm>
             <a:off x="548640" y="2340720"/>
-            <a:ext cx="8046360" cy="292320"/>
+            <a:ext cx="8046000" cy="291960"/>
           </a:xfrm>
           <a:prstGeom prst="rect">
             <a:avLst/>
@@ -8736,7 +8967,7 @@
         <p:spPr>
           <a:xfrm>
             <a:off x="548640" y="2670120"/>
-            <a:ext cx="8046360" cy="319680"/>
+            <a:ext cx="8046000" cy="319320"/>
           </a:xfrm>
           <a:prstGeom prst="rect">
             <a:avLst/>
@@ -8773,8 +9004,20 @@
                 <a:effectLst/>
                 <a:uFillTx/>
                 <a:latin typeface="Calibri"/>
+                <a:ea typeface="Noto Sans CJK SC"/>
               </a:rPr>
-              <a:t>Fără echilibrare: 20–40% pacienți rataţi. Cu SMOTE: Recall-ul crește considerabil =&gt; 1.000</a:t>
+              <a:t>Fără echilibrare: 20–40% pacienți rataţi. Cu SMOTE: Recall-ul poate crește considerabil </a:t>
+            </a:r>
+            <a:r>
+              <a:rPr lang="en-US" sz="1100" b="0" u="none" strike="noStrike">
+                <a:solidFill>
+                  <a:srgbClr val="94a3b8"/>
+                </a:solidFill>
+                <a:effectLst/>
+                <a:uFillTx/>
+                <a:latin typeface="Calibri"/>
+              </a:rPr>
+              <a:t>→  1.000</a:t>
             </a:r>
             <a:endParaRPr lang="en-US" sz="1100" b="0" u="none" strike="noStrike">
               <a:solidFill>
@@ -8796,7 +9039,7 @@
         <p:spPr>
           <a:xfrm>
             <a:off x="365760" y="3154680"/>
-            <a:ext cx="8412120" cy="776880"/>
+            <a:ext cx="8411760" cy="776520"/>
           </a:xfrm>
           <a:prstGeom prst="rect">
             <a:avLst/>
@@ -8822,6 +9065,11 @@
             <a:noAutofit/>
           </a:bodyPr>
           <a:p>
+            <a:pPr>
+              <a:lnSpc>
+                <a:spcPct val="100000"/>
+              </a:lnSpc>
+            </a:pPr>
             <a:endParaRPr lang="en-US" sz="1800" b="0" u="none" strike="noStrike">
               <a:solidFill>
                 <a:srgbClr val="ffffff"/>
@@ -8842,7 +9090,7 @@
         <p:spPr>
           <a:xfrm>
             <a:off x="365760" y="3154680"/>
-            <a:ext cx="63720" cy="776880"/>
+            <a:ext cx="63360" cy="776520"/>
           </a:xfrm>
           <a:prstGeom prst="rect">
             <a:avLst/>
@@ -8868,6 +9116,11 @@
             <a:noAutofit/>
           </a:bodyPr>
           <a:p>
+            <a:pPr>
+              <a:lnSpc>
+                <a:spcPct val="100000"/>
+              </a:lnSpc>
+            </a:pPr>
             <a:endParaRPr lang="en-US" sz="1800" b="0" u="none" strike="noStrike">
               <a:solidFill>
                 <a:srgbClr val="000000"/>
@@ -8888,7 +9141,7 @@
         <p:spPr>
           <a:xfrm>
             <a:off x="548640" y="3209400"/>
-            <a:ext cx="8046360" cy="292320"/>
+            <a:ext cx="8046000" cy="291960"/>
           </a:xfrm>
           <a:prstGeom prst="rect">
             <a:avLst/>
@@ -8948,7 +9201,7 @@
         <p:spPr>
           <a:xfrm>
             <a:off x="548640" y="3538800"/>
-            <a:ext cx="8046360" cy="319680"/>
+            <a:ext cx="8046000" cy="319320"/>
           </a:xfrm>
           <a:prstGeom prst="rect">
             <a:avLst/>
@@ -9008,7 +9261,7 @@
         <p:spPr>
           <a:xfrm>
             <a:off x="365760" y="4023360"/>
-            <a:ext cx="8412120" cy="776880"/>
+            <a:ext cx="8411760" cy="776520"/>
           </a:xfrm>
           <a:prstGeom prst="rect">
             <a:avLst/>
@@ -9034,6 +9287,11 @@
             <a:noAutofit/>
           </a:bodyPr>
           <a:p>
+            <a:pPr>
+              <a:lnSpc>
+                <a:spcPct val="100000"/>
+              </a:lnSpc>
+            </a:pPr>
             <a:endParaRPr lang="en-US" sz="1800" b="0" u="none" strike="noStrike">
               <a:solidFill>
                 <a:srgbClr val="ffffff"/>
@@ -9054,7 +9312,7 @@
         <p:spPr>
           <a:xfrm>
             <a:off x="365760" y="4023360"/>
-            <a:ext cx="63720" cy="776880"/>
+            <a:ext cx="63360" cy="776520"/>
           </a:xfrm>
           <a:prstGeom prst="rect">
             <a:avLst/>
@@ -9080,6 +9338,11 @@
             <a:noAutofit/>
           </a:bodyPr>
           <a:p>
+            <a:pPr>
+              <a:lnSpc>
+                <a:spcPct val="100000"/>
+              </a:lnSpc>
+            </a:pPr>
             <a:endParaRPr lang="en-US" sz="1800" b="0" u="none" strike="noStrike">
               <a:solidFill>
                 <a:srgbClr val="000000"/>
@@ -9100,7 +9363,7 @@
         <p:spPr>
           <a:xfrm>
             <a:off x="548640" y="4078080"/>
-            <a:ext cx="8046360" cy="292320"/>
+            <a:ext cx="8046000" cy="291960"/>
           </a:xfrm>
           <a:prstGeom prst="rect">
             <a:avLst/>
@@ -9160,7 +9423,7 @@
         <p:spPr>
           <a:xfrm>
             <a:off x="548640" y="4407480"/>
-            <a:ext cx="8046360" cy="319680"/>
+            <a:ext cx="8046000" cy="319320"/>
           </a:xfrm>
           <a:prstGeom prst="rect">
             <a:avLst/>
@@ -9257,7 +9520,7 @@
         <p:spPr>
           <a:xfrm>
             <a:off x="6858000" y="2286000"/>
-            <a:ext cx="4571640" cy="4571640"/>
+            <a:ext cx="4571280" cy="4571280"/>
           </a:xfrm>
           <a:prstGeom prst="ellipse">
             <a:avLst/>
@@ -9287,6 +9550,11 @@
             <a:noAutofit/>
           </a:bodyPr>
           <a:p>
+            <a:pPr>
+              <a:lnSpc>
+                <a:spcPct val="100000"/>
+              </a:lnSpc>
+            </a:pPr>
             <a:endParaRPr lang="en-US" sz="1800" b="0" u="none" strike="noStrike">
               <a:solidFill>
                 <a:srgbClr val="000000"/>
@@ -9307,7 +9575,7 @@
         <p:spPr>
           <a:xfrm>
             <a:off x="457200" y="274320"/>
-            <a:ext cx="8229240" cy="365400"/>
+            <a:ext cx="8228880" cy="365040"/>
           </a:xfrm>
           <a:prstGeom prst="rect">
             <a:avLst/>
@@ -9356,7 +9624,7 @@
         <p:spPr>
           <a:xfrm>
             <a:off x="457200" y="640080"/>
-            <a:ext cx="7314840" cy="548280"/>
+            <a:ext cx="7314480" cy="547920"/>
           </a:xfrm>
           <a:prstGeom prst="rect">
             <a:avLst/>
@@ -9396,7 +9664,7 @@
               </a:rPr>
               <a:t>Direcții viitoare</a:t>
             </a:r>
-            <a:endParaRPr lang="en-US" sz="2800" b="0" u="sng" strike="noStrike">
+            <a:endParaRPr lang="en-US" sz="2800" b="0" u="none" strike="noStrike">
               <a:solidFill>
                 <a:srgbClr val="ffffff"/>
               </a:solidFill>
@@ -9416,7 +9684,7 @@
         <p:spPr>
           <a:xfrm>
             <a:off x="457200" y="1371600"/>
-            <a:ext cx="7131960" cy="2743200"/>
+            <a:ext cx="7131600" cy="2742840"/>
           </a:xfrm>
           <a:prstGeom prst="rect">
             <a:avLst/>
@@ -9463,11 +9731,10 @@
               <a:effectLst/>
               <a:uFillTx/>
               <a:latin typeface="Arial"/>
-              <a:ea typeface="Noto Sans CJK SC"/>
-            </a:endParaRPr>
-          </a:p>
-          <a:p>
-            <a:pPr marL="360000" lvl="1" defTabSz="914400">
+            </a:endParaRPr>
+          </a:p>
+          <a:p>
+            <a:pPr marL="360000" lvl="1" indent="-216000" defTabSz="914400">
               <a:lnSpc>
                 <a:spcPct val="100000"/>
               </a:lnSpc>
@@ -9499,11 +9766,28 @@
               <a:effectLst/>
               <a:uFillTx/>
               <a:latin typeface="Arial"/>
-              <a:ea typeface="Noto Sans CJK SC"/>
-            </a:endParaRPr>
-          </a:p>
-          <a:p>
-            <a:pPr marL="360000" lvl="1" defTabSz="914400">
+            </a:endParaRPr>
+          </a:p>
+          <a:p>
+            <a:pPr defTabSz="914400">
+              <a:lnSpc>
+                <a:spcPct val="100000"/>
+              </a:lnSpc>
+              <a:tabLst>
+                <a:tab algn="l" pos="0"/>
+              </a:tabLst>
+            </a:pPr>
+            <a:endParaRPr lang="en-US" sz="1400" b="0" u="none" strike="noStrike">
+              <a:solidFill>
+                <a:srgbClr val="ffffff"/>
+              </a:solidFill>
+              <a:effectLst/>
+              <a:uFillTx/>
+              <a:latin typeface="Arial"/>
+            </a:endParaRPr>
+          </a:p>
+          <a:p>
+            <a:pPr marL="360000" lvl="1" indent="-216000" defTabSz="914400">
               <a:lnSpc>
                 <a:spcPct val="100000"/>
               </a:lnSpc>
@@ -9517,6 +9801,30 @@
                 <a:tab algn="l" pos="0"/>
               </a:tabLst>
             </a:pPr>
+            <a:r>
+              <a:rPr lang="en-US" sz="1400" b="0" u="none" strike="noStrike">
+                <a:solidFill>
+                  <a:srgbClr val="ffffff"/>
+                </a:solidFill>
+                <a:effectLst/>
+                <a:uFillTx/>
+                <a:latin typeface="Arial"/>
+                <a:ea typeface="Noto Sans CJK SC"/>
+              </a:rPr>
+              <a:t>LIME(Interpretable Model-agnostic Explanations)</a:t>
+            </a:r>
+            <a:r>
+              <a:rPr lang="en-US" sz="1400" b="0" u="none" strike="noStrike">
+                <a:solidFill>
+                  <a:srgbClr val="ffffff"/>
+                </a:solidFill>
+                <a:effectLst/>
+                <a:uFillTx/>
+                <a:latin typeface="Arial"/>
+                <a:ea typeface="Noto Sans CJK SC"/>
+              </a:rPr>
+              <a:t>	</a:t>
+            </a:r>
             <a:endParaRPr lang="en-US" sz="1400" b="0" u="none" strike="noStrike">
               <a:solidFill>
                 <a:srgbClr val="ffffff"/>
@@ -9524,11 +9832,120 @@
               <a:effectLst/>
               <a:uFillTx/>
               <a:latin typeface="Arial"/>
-              <a:ea typeface="Noto Sans CJK SC"/>
-            </a:endParaRPr>
-          </a:p>
-          <a:p>
-            <a:pPr marL="360000" lvl="1" defTabSz="914400">
+            </a:endParaRPr>
+          </a:p>
+        </p:txBody>
+      </p:sp>
+      <p:sp>
+        <p:nvSpPr>
+          <p:cNvPr id="92" name="Text 8"/>
+          <p:cNvSpPr/>
+          <p:nvPr/>
+        </p:nvSpPr>
+        <p:spPr>
+          <a:xfrm>
+            <a:off x="457200" y="4297680"/>
+            <a:ext cx="5028480" cy="639360"/>
+          </a:xfrm>
+          <a:prstGeom prst="rect">
+            <a:avLst/>
+          </a:prstGeom>
+          <a:noFill/>
+          <a:ln w="0">
+            <a:noFill/>
+          </a:ln>
+        </p:spPr>
+        <p:style>
+          <a:lnRef idx="0"/>
+          <a:fillRef idx="0"/>
+          <a:effectRef idx="0"/>
+          <a:fontRef idx="minor"/>
+        </p:style>
+        <p:txBody>
+          <a:bodyPr lIns="90000" rIns="90000" tIns="45000" bIns="45000" anchor="ctr">
+            <a:noAutofit/>
+          </a:bodyPr>
+          <a:p>
+            <a:pPr algn="ctr" defTabSz="914400">
+              <a:lnSpc>
+                <a:spcPct val="100000"/>
+              </a:lnSpc>
+              <a:tabLst>
+                <a:tab algn="l" pos="0"/>
+              </a:tabLst>
+            </a:pPr>
+            <a:endParaRPr lang="en-US" sz="1800" b="0" u="none" strike="noStrike">
+              <a:solidFill>
+                <a:srgbClr val="ffffff"/>
+              </a:solidFill>
+              <a:effectLst/>
+              <a:uFillTx/>
+              <a:latin typeface="Arial"/>
+            </a:endParaRPr>
+          </a:p>
+        </p:txBody>
+      </p:sp>
+      <p:sp>
+        <p:nvSpPr>
+          <p:cNvPr id="93" name="Text 7"/>
+          <p:cNvSpPr/>
+          <p:nvPr/>
+        </p:nvSpPr>
+        <p:spPr>
+          <a:xfrm>
+            <a:off x="411840" y="2514600"/>
+            <a:ext cx="7131600" cy="2742840"/>
+          </a:xfrm>
+          <a:prstGeom prst="rect">
+            <a:avLst/>
+          </a:prstGeom>
+          <a:noFill/>
+          <a:ln w="0">
+            <a:noFill/>
+          </a:ln>
+        </p:spPr>
+        <p:style>
+          <a:lnRef idx="0"/>
+          <a:fillRef idx="0"/>
+          <a:effectRef idx="0"/>
+          <a:fontRef idx="minor"/>
+        </p:style>
+        <p:txBody>
+          <a:bodyPr lIns="90000" rIns="90000" tIns="45000" bIns="45000" anchor="t">
+            <a:noAutofit/>
+          </a:bodyPr>
+          <a:p>
+            <a:pPr marL="360000" defTabSz="914400">
+              <a:lnSpc>
+                <a:spcPct val="100000"/>
+              </a:lnSpc>
+              <a:tabLst>
+                <a:tab algn="l" pos="0"/>
+              </a:tabLst>
+            </a:pPr>
+            <a:r>
+              <a:rPr lang="en-US" sz="1800" b="0" u="none" strike="noStrike">
+                <a:solidFill>
+                  <a:srgbClr val="ffffff"/>
+                </a:solidFill>
+                <a:effectLst/>
+                <a:uFillTx/>
+                <a:latin typeface="Arial"/>
+                <a:ea typeface="Noto Sans CJK SC"/>
+              </a:rPr>
+              <a:t>Date Multimodale:</a:t>
+            </a:r>
+            <a:endParaRPr lang="en-US" sz="1800" b="0" u="none" strike="noStrike">
+              <a:solidFill>
+                <a:srgbClr val="ffffff"/>
+              </a:solidFill>
+              <a:effectLst/>
+              <a:uFillTx/>
+              <a:latin typeface="Arial"/>
+            </a:endParaRPr>
+          </a:p>
+          <a:p>
+            <a:pPr marL="360000" lvl="1" indent="-216000" defTabSz="914400">
               <a:lnSpc>
                 <a:spcPct val="100000"/>
               </a:lnSpc>
@@ -9550,19 +9967,9 @@
                 <a:effectLst/>
                 <a:uFillTx/>
                 <a:latin typeface="Arial"/>
+                <a:ea typeface="Noto Sans CJK SC"/>
               </a:rPr>
-              <a:t>LIME(Interpretable Model-agnostic Explanations)</a:t>
-            </a:r>
-            <a:r>
-              <a:rPr lang="en-US" sz="1400" b="0" u="none" strike="noStrike">
-                <a:solidFill>
-                  <a:srgbClr val="ffffff"/>
-                </a:solidFill>
-                <a:effectLst/>
-                <a:uFillTx/>
-                <a:latin typeface="Arial"/>
-              </a:rPr>
-              <a:t>	</a:t>
+              <a:t>Imagistică Medicală: Utilizarea tehnicilor de Computer Vision pentru analiza fotografiilor clinice identificând semne timpurii ale bolii.</a:t>
             </a:r>
             <a:endParaRPr lang="en-US" sz="1400" b="0" u="none" strike="noStrike">
               <a:solidFill>
@@ -9571,42 +9978,10 @@
               <a:effectLst/>
               <a:uFillTx/>
               <a:latin typeface="Arial"/>
-              <a:ea typeface="Noto Sans CJK SC"/>
-            </a:endParaRPr>
-          </a:p>
-        </p:txBody>
-      </p:sp>
-      <p:sp>
-        <p:nvSpPr>
-          <p:cNvPr id="92" name="Text 8"/>
-          <p:cNvSpPr/>
-          <p:nvPr/>
-        </p:nvSpPr>
-        <p:spPr>
-          <a:xfrm>
-            <a:off x="457200" y="4297680"/>
-            <a:ext cx="5028840" cy="639720"/>
-          </a:xfrm>
-          <a:prstGeom prst="rect">
-            <a:avLst/>
-          </a:prstGeom>
-          <a:noFill/>
-          <a:ln w="0">
-            <a:noFill/>
-          </a:ln>
-        </p:spPr>
-        <p:style>
-          <a:lnRef idx="0"/>
-          <a:fillRef idx="0"/>
-          <a:effectRef idx="0"/>
-          <a:fontRef idx="minor"/>
-        </p:style>
-        <p:txBody>
-          <a:bodyPr lIns="90000" rIns="90000" tIns="45000" bIns="45000" anchor="ctr">
-            <a:noAutofit/>
-          </a:bodyPr>
-          <a:p>
-            <a:pPr algn="ctr" defTabSz="914400">
+            </a:endParaRPr>
+          </a:p>
+          <a:p>
+            <a:pPr defTabSz="914400">
               <a:lnSpc>
                 <a:spcPct val="100000"/>
               </a:lnSpc>
@@ -9614,7 +9989,7 @@
                 <a:tab algn="l" pos="0"/>
               </a:tabLst>
             </a:pPr>
-            <a:endParaRPr lang="en-US" sz="1800" b="0" u="none" strike="noStrike">
+            <a:endParaRPr lang="en-US" sz="1400" b="0" u="none" strike="noStrike">
               <a:solidFill>
                 <a:srgbClr val="ffffff"/>
               </a:solidFill>
@@ -9623,70 +9998,8 @@
               <a:latin typeface="Arial"/>
             </a:endParaRPr>
           </a:p>
-        </p:txBody>
-      </p:sp>
-      <p:sp>
-        <p:nvSpPr>
-          <p:cNvPr id="93" name="Text 7"/>
-          <p:cNvSpPr/>
-          <p:nvPr/>
-        </p:nvSpPr>
-        <p:spPr>
-          <a:xfrm>
-            <a:off x="411840" y="2514600"/>
-            <a:ext cx="7131960" cy="2743200"/>
-          </a:xfrm>
-          <a:prstGeom prst="rect">
-            <a:avLst/>
-          </a:prstGeom>
-          <a:noFill/>
-          <a:ln w="0">
-            <a:noFill/>
-          </a:ln>
-        </p:spPr>
-        <p:style>
-          <a:lnRef idx="0"/>
-          <a:fillRef idx="0"/>
-          <a:effectRef idx="0"/>
-          <a:fontRef idx="minor"/>
-        </p:style>
-        <p:txBody>
-          <a:bodyPr lIns="90000" rIns="90000" tIns="45000" bIns="45000" anchor="t">
-            <a:noAutofit/>
-          </a:bodyPr>
-          <a:p>
-            <a:pPr marL="360000" defTabSz="914400">
-              <a:lnSpc>
-                <a:spcPct val="100000"/>
-              </a:lnSpc>
-              <a:tabLst>
-                <a:tab algn="l" pos="0"/>
-              </a:tabLst>
-            </a:pPr>
-            <a:r>
-              <a:rPr lang="en-US" sz="1800" b="0" u="none" strike="noStrike">
-                <a:solidFill>
-                  <a:srgbClr val="ffffff"/>
-                </a:solidFill>
-                <a:effectLst/>
-                <a:uFillTx/>
-                <a:latin typeface="Arial"/>
-                <a:ea typeface="Noto Sans CJK SC"/>
-              </a:rPr>
-              <a:t>Date Multimodale:</a:t>
-            </a:r>
-            <a:endParaRPr lang="en-US" sz="1800" b="0" u="none" strike="noStrike">
-              <a:solidFill>
-                <a:srgbClr val="ffffff"/>
-              </a:solidFill>
-              <a:effectLst/>
-              <a:uFillTx/>
-              <a:latin typeface="Arial"/>
-              <a:ea typeface="Noto Sans CJK SC"/>
-            </a:endParaRPr>
-          </a:p>
-          <a:p>
-            <a:pPr marL="360000" lvl="1" defTabSz="914400">
+          <a:p>
+            <a:pPr marL="360000" lvl="1" indent="-216000" defTabSz="914400">
               <a:lnSpc>
                 <a:spcPct val="100000"/>
               </a:lnSpc>
@@ -9710,19 +10023,7 @@
                 <a:latin typeface="Arial"/>
                 <a:ea typeface="Noto Sans CJK SC"/>
               </a:rPr>
-              <a:t>Imagistică Medicală: Utilizarea tehnicilor de Computer Vision pentru analiza </a:t>
-            </a:r>
-            <a:r>
-              <a:rPr lang="en-US" sz="1400" b="0" u="none" strike="noStrike">
-                <a:solidFill>
-                  <a:srgbClr val="ffffff"/>
-                </a:solidFill>
-                <a:effectLst/>
-                <a:uFillTx/>
-                <a:latin typeface="Arial"/>
-                <a:ea typeface="Noto Sans CJK SC"/>
-              </a:rPr>
-              <a:t>fotografiilor clinice identificând semne timpurii ale bolii.</a:t>
+              <a:t> OCR și NLP: Implementarea unui modul de OCR pentru extragerea automată datelor din analize scanate, urmată de procesarea limbajului natural (NLP) pentru a converti observațiile textuale ale medicilor în variabile de intrare pentru modelul de predicție.</a:t>
             </a:r>
             <a:endParaRPr lang="en-US" sz="1400" b="0" u="none" strike="noStrike">
               <a:solidFill>
@@ -9731,105 +10032,6 @@
               <a:effectLst/>
               <a:uFillTx/>
               <a:latin typeface="Arial"/>
-              <a:ea typeface="Noto Sans CJK SC"/>
-            </a:endParaRPr>
-          </a:p>
-          <a:p>
-            <a:pPr marL="360000" lvl="1" defTabSz="914400">
-              <a:lnSpc>
-                <a:spcPct val="100000"/>
-              </a:lnSpc>
-              <a:buClr>
-                <a:srgbClr val="ffffff"/>
-              </a:buClr>
-              <a:buSzPct val="45000"/>
-              <a:buFont typeface="Wingdings" charset="2"/>
-              <a:buChar char=""/>
-              <a:tabLst>
-                <a:tab algn="l" pos="0"/>
-              </a:tabLst>
-            </a:pPr>
-            <a:endParaRPr lang="en-US" sz="1400" b="0" u="none" strike="noStrike">
-              <a:solidFill>
-                <a:srgbClr val="ffffff"/>
-              </a:solidFill>
-              <a:effectLst/>
-              <a:uFillTx/>
-              <a:latin typeface="Arial"/>
-              <a:ea typeface="Noto Sans CJK SC"/>
-            </a:endParaRPr>
-          </a:p>
-          <a:p>
-            <a:pPr marL="360000" lvl="1" defTabSz="914400">
-              <a:lnSpc>
-                <a:spcPct val="100000"/>
-              </a:lnSpc>
-              <a:buClr>
-                <a:srgbClr val="ffffff"/>
-              </a:buClr>
-              <a:buSzPct val="45000"/>
-              <a:buFont typeface="Wingdings" charset="2"/>
-              <a:buChar char=""/>
-              <a:tabLst>
-                <a:tab algn="l" pos="0"/>
-              </a:tabLst>
-            </a:pPr>
-            <a:r>
-              <a:rPr lang="en-US" sz="1400" b="0" u="none" strike="noStrike">
-                <a:solidFill>
-                  <a:srgbClr val="ffffff"/>
-                </a:solidFill>
-                <a:effectLst/>
-                <a:uFillTx/>
-                <a:latin typeface="Arial"/>
-                <a:ea typeface="Noto Sans CJK SC"/>
-              </a:rPr>
-              <a:t> OCR și NLP: Implementarea unui modul de OCR pentru extragerea </a:t>
-            </a:r>
-            <a:r>
-              <a:rPr lang="en-US" sz="1400" b="0" u="none" strike="noStrike">
-                <a:solidFill>
-                  <a:srgbClr val="ffffff"/>
-                </a:solidFill>
-                <a:effectLst/>
-                <a:uFillTx/>
-                <a:latin typeface="Arial"/>
-                <a:ea typeface="Noto Sans CJK SC"/>
-              </a:rPr>
-              <a:t>automată datelor din analize scanate, urmată de procesarea limbajului </a:t>
-            </a:r>
-            <a:r>
-              <a:rPr lang="en-US" sz="1400" b="0" u="none" strike="noStrike">
-                <a:solidFill>
-                  <a:srgbClr val="ffffff"/>
-                </a:solidFill>
-                <a:effectLst/>
-                <a:uFillTx/>
-                <a:latin typeface="Arial"/>
-                <a:ea typeface="Noto Sans CJK SC"/>
-              </a:rPr>
-              <a:t>natural (NLP) pentru a converti observațiile textuale ale medicilor în variabile </a:t>
-            </a:r>
-            <a:r>
-              <a:rPr lang="en-US" sz="1400" b="0" u="none" strike="noStrike">
-                <a:solidFill>
-                  <a:srgbClr val="ffffff"/>
-                </a:solidFill>
-                <a:effectLst/>
-                <a:uFillTx/>
-                <a:latin typeface="Arial"/>
-                <a:ea typeface="Noto Sans CJK SC"/>
-              </a:rPr>
-              <a:t>de intrare pentru modelul de predicție.</a:t>
-            </a:r>
-            <a:endParaRPr lang="en-US" sz="1400" b="0" u="none" strike="noStrike">
-              <a:solidFill>
-                <a:srgbClr val="ffffff"/>
-              </a:solidFill>
-              <a:effectLst/>
-              <a:uFillTx/>
-              <a:latin typeface="Arial"/>
-              <a:ea typeface="Noto Sans CJK SC"/>
             </a:endParaRPr>
           </a:p>
         </p:txBody>
@@ -9880,7 +10082,7 @@
         <p:spPr>
           <a:xfrm>
             <a:off x="457200" y="274320"/>
-            <a:ext cx="8229240" cy="365400"/>
+            <a:ext cx="8228880" cy="365040"/>
           </a:xfrm>
           <a:prstGeom prst="rect">
             <a:avLst/>
@@ -9901,6 +10103,11 @@
             <a:noAutofit/>
           </a:bodyPr>
           <a:p>
+            <a:pPr>
+              <a:lnSpc>
+                <a:spcPct val="100000"/>
+              </a:lnSpc>
+            </a:pPr>
             <a:endParaRPr lang="en-US" sz="1800" b="0" u="none" strike="noStrike">
               <a:solidFill>
                 <a:srgbClr val="ffffff"/>
@@ -9921,7 +10128,7 @@
         <p:spPr>
           <a:xfrm>
             <a:off x="548640" y="1801440"/>
-            <a:ext cx="8046360" cy="319680"/>
+            <a:ext cx="8046000" cy="319320"/>
           </a:xfrm>
           <a:prstGeom prst="rect">
             <a:avLst/>
@@ -9964,13 +10171,13 @@
       <p:sp>
         <p:nvSpPr>
           <p:cNvPr id="96" name=""/>
-          <p:cNvSpPr txBox="1"/>
+          <p:cNvSpPr/>
           <p:nvPr/>
         </p:nvSpPr>
         <p:spPr>
           <a:xfrm>
             <a:off x="1600200" y="1828800"/>
-            <a:ext cx="6629400" cy="2057400"/>
+            <a:ext cx="6629040" cy="2057040"/>
           </a:xfrm>
           <a:prstGeom prst="rect">
             <a:avLst/>
@@ -9980,11 +10187,22 @@
             <a:noFill/>
           </a:ln>
         </p:spPr>
+        <p:style>
+          <a:lnRef idx="0"/>
+          <a:fillRef idx="0"/>
+          <a:effectRef idx="0"/>
+          <a:fontRef idx="minor"/>
+        </p:style>
         <p:txBody>
           <a:bodyPr lIns="90000" rIns="90000" tIns="45000" bIns="45000" anchor="t">
             <a:spAutoFit/>
           </a:bodyPr>
           <a:p>
+            <a:pPr>
+              <a:lnSpc>
+                <a:spcPct val="100000"/>
+              </a:lnSpc>
+            </a:pPr>
             <a:r>
               <a:rPr lang="en-US" sz="3600" b="0" u="none" strike="noStrike">
                 <a:solidFill>
@@ -9994,40 +10212,7 @@
                 <a:uFillTx/>
                 <a:latin typeface="Arial"/>
               </a:rPr>
-              <a:t>Mulțum</a:t>
-            </a:r>
-            <a:r>
-              <a:rPr lang="en-US" sz="3600" b="0" u="none" strike="noStrike">
-                <a:solidFill>
-                  <a:srgbClr val="ffffff"/>
-                </a:solidFill>
-                <a:effectLst/>
-                <a:uFillTx/>
-                <a:latin typeface="Arial"/>
-              </a:rPr>
-              <a:t>esc </a:t>
-            </a:r>
-            <a:r>
-              <a:rPr lang="en-US" sz="3600" b="0" u="none" strike="noStrike">
-                <a:solidFill>
-                  <a:srgbClr val="ffffff"/>
-                </a:solidFill>
-                <a:effectLst/>
-                <a:uFillTx/>
-                <a:latin typeface="Arial"/>
-              </a:rPr>
-              <a:t>pentru </a:t>
-            </a:r>
-            <a:r>
-              <a:rPr lang="en-US" sz="3600" b="0" u="none" strike="noStrike">
-                <a:solidFill>
-                  <a:srgbClr val="ffffff"/>
-                </a:solidFill>
-                <a:effectLst/>
-                <a:uFillTx/>
-                <a:latin typeface="Arial"/>
-              </a:rPr>
-              <a:t>atenție!</a:t>
+              <a:t>Mulțumesc pentru atenție!</a:t>
             </a:r>
             <a:endParaRPr lang="en-US" sz="3600" b="0" u="none" strike="noStrike">
               <a:solidFill>
@@ -10039,6 +10224,11 @@
             </a:endParaRPr>
           </a:p>
           <a:p>
+            <a:pPr>
+              <a:lnSpc>
+                <a:spcPct val="100000"/>
+              </a:lnSpc>
+            </a:pPr>
             <a:r>
               <a:rPr lang="en-US" sz="3600" b="0" u="none" strike="noStrike">
                 <a:solidFill>
@@ -10059,29 +10249,7 @@
                 <a:uFillTx/>
                 <a:latin typeface="Arial"/>
               </a:rPr>
-              <a:t>      </a:t>
-            </a:r>
-            <a:r>
-              <a:rPr lang="en-US" sz="3600" b="0" u="none" strike="noStrike">
-                <a:solidFill>
-                  <a:srgbClr val="ffffff"/>
-                </a:solidFill>
-                <a:effectLst/>
-                <a:uFillTx/>
-                <a:latin typeface="Arial"/>
-              </a:rPr>
-              <a:t>🤕</a:t>
-            </a:r>
-            <a:r>
-              <a:rPr lang="en-US" sz="3600" b="0" u="none" strike="noStrike">
-                <a:solidFill>
-                  <a:srgbClr val="ffffff"/>
-                </a:solidFill>
-                <a:effectLst/>
-                <a:uFillTx/>
-                <a:latin typeface="Arial"/>
-              </a:rPr>
-              <a:t>🩺 🏥</a:t>
+              <a:t>      🤕🩺 🏥</a:t>
             </a:r>
             <a:endParaRPr lang="en-US" sz="3600" b="0" u="none" strike="noStrike">
               <a:solidFill>
